--- a/Grammar_Mastery/07_Verbs/GM-V-11_Passive_Voice.pptx
+++ b/Grammar_Mastery/07_Verbs/GM-V-11_Passive_Voice.pptx
@@ -532,7 +532,11 @@
           <a:lstStyle/>
           <a:p>
             <a:r>
-              <a:rPr lang="en-US" dirty="0"/>
+              <a:rPr lang="ar-SA" dirty="0">
+                <a:latin typeface="Amiri" pitchFamily="2" charset="-78"/>
+                <a:ea typeface="Amiri" pitchFamily="2" charset="-78"/>
+                <a:cs typeface="Amiri" pitchFamily="2" charset="-78"/>
+              </a:rPr>
               <a:t>LESSON AT A GLANCE — planned for 56 minutes, leaving about 4 minutes for Teams delays.
 0–1 Welcome · 1–2 Lesson map · 2–9 Do Now + answers · 9–10 Objectives · 10–13 Grammar words · 13–24 The grammar, step by step · 24–26 Quick check · 26–29 I Do · 29–38 We Do (sort, repair, practise) · 38–49 You Do (read, speak, write on your route) · 49–54 Feedback (model, self-check, exit ticket) · 54–56 Preparation.
 FLEX slides are optional: use them if the class is moving quickly; otherwise the same activities are on the website for homework.
@@ -1521,7 +1525,11 @@
           <a:lstStyle/>
           <a:p>
             <a:r>
-              <a:rPr lang="en-US" dirty="0"/>
+              <a:rPr lang="ar-SA" dirty="0">
+                <a:latin typeface="Amiri" pitchFamily="2" charset="-78"/>
+                <a:ea typeface="Amiri" pitchFamily="2" charset="-78"/>
+                <a:cs typeface="Amiri" pitchFamily="2" charset="-78"/>
+              </a:rPr>
               <a:t>WELCOME (1 min) — while students join.
 • Greet each student by name as they arrive: السَّلَامُ عَلَيْكُمْ. Take the register (Pastoral Tracker: attendance 0/1).
 • 2-MINUTE CHECK-IN (SEND training): a private chat to any student who seemed unsettled last lesson — “Are you okay today? 👍 / 👎”.
@@ -3978,6 +3986,7 @@
                   <a:srgbClr val="D4AF37"/>
                 </a:solidFill>
                 <a:latin typeface="Amiri" pitchFamily="2" charset="-78"/>
+                <a:ea typeface="Amiri" pitchFamily="2" charset="-78"/>
                 <a:cs typeface="Amiri" pitchFamily="2" charset="-78"/>
               </a:rPr>
               <a:t>م</a:t>
@@ -4184,6 +4193,7 @@
                   <a:srgbClr val="D4AF37"/>
                 </a:solidFill>
                 <a:latin typeface="Amiri" pitchFamily="2" charset="-78"/>
+                <a:ea typeface="Amiri" pitchFamily="2" charset="-78"/>
                 <a:cs typeface="Amiri" pitchFamily="2" charset="-78"/>
               </a:rPr>
               <a:t>الْمَبْنِيُّ لِلْمَجْهُولِ فِي الْمَاضِي وَالْمُضَارِعِ</a:t>
@@ -4641,6 +4651,7 @@
                   <a:srgbClr val="D4AF37"/>
                 </a:solidFill>
                 <a:latin typeface="Amiri" pitchFamily="2" charset="-78"/>
+                <a:ea typeface="Amiri" pitchFamily="2" charset="-78"/>
                 <a:cs typeface="Amiri" pitchFamily="2" charset="-78"/>
               </a:rPr>
               <a:t>م</a:t>
@@ -4961,6 +4972,7 @@
                   <a:srgbClr val="8A6D1E"/>
                 </a:solidFill>
                 <a:latin typeface="Amiri" pitchFamily="2" charset="-78"/>
+                <a:ea typeface="Amiri" pitchFamily="2" charset="-78"/>
                 <a:cs typeface="Amiri" pitchFamily="2" charset="-78"/>
               </a:rPr>
               <a:t>التَّحْوِيلُ وَسَبَبُ الِاخْتِيَارِ</a:t>
@@ -5241,6 +5253,7 @@
                   <a:srgbClr val="1B3B6F"/>
                 </a:solidFill>
                 <a:latin typeface="Amiri" pitchFamily="2" charset="-78"/>
+                <a:ea typeface="Amiri" pitchFamily="2" charset="-78"/>
                 <a:cs typeface="Amiri" pitchFamily="2" charset="-78"/>
               </a:rPr>
               <a:t>كَتَبَ · كُتِبَ</a:t>
@@ -5447,6 +5460,7 @@
                   <a:srgbClr val="1B3B6F"/>
                 </a:solidFill>
                 <a:latin typeface="Amiri" pitchFamily="2" charset="-78"/>
+                <a:ea typeface="Amiri" pitchFamily="2" charset="-78"/>
                 <a:cs typeface="Amiri" pitchFamily="2" charset="-78"/>
               </a:rPr>
               <a:t>كُتِبَتِ الرِّسَالَةُ.</a:t>
@@ -5653,6 +5667,7 @@
                   <a:srgbClr val="1B3B6F"/>
                 </a:solidFill>
                 <a:latin typeface="Amiri" pitchFamily="2" charset="-78"/>
+                <a:ea typeface="Amiri" pitchFamily="2" charset="-78"/>
                 <a:cs typeface="Amiri" pitchFamily="2" charset="-78"/>
               </a:rPr>
               <a:t>الرِّسَالَةَ · الرِّسَالَةُ</a:t>
@@ -5859,6 +5874,7 @@
                   <a:srgbClr val="1B3B6F"/>
                 </a:solidFill>
                 <a:latin typeface="Amiri" pitchFamily="2" charset="-78"/>
+                <a:ea typeface="Amiri" pitchFamily="2" charset="-78"/>
                 <a:cs typeface="Amiri" pitchFamily="2" charset="-78"/>
               </a:rPr>
               <a:t>سُرِقَتِ الدَّرَّاجَةُ.</a:t>
@@ -6000,6 +6016,7 @@
                   <a:srgbClr val="1B3B6F"/>
                 </a:solidFill>
                 <a:latin typeface="Amiri" pitchFamily="2" charset="-78"/>
+                <a:ea typeface="Amiri" pitchFamily="2" charset="-78"/>
                 <a:cs typeface="Amiri" pitchFamily="2" charset="-78"/>
               </a:rPr>
               <a:t>تُفْحَصُ الْحَقَائِبُ عِنْدَ الْمَدْخَلِ.</a:t>
@@ -6141,6 +6158,7 @@
                   <a:srgbClr val="1B3B6F"/>
                 </a:solidFill>
                 <a:latin typeface="Amiri" pitchFamily="2" charset="-78"/>
+                <a:ea typeface="Amiri" pitchFamily="2" charset="-78"/>
                 <a:cs typeface="Amiri" pitchFamily="2" charset="-78"/>
               </a:rPr>
               <a:t>يُعْتَقَدُ أَنَّ التِّقْنِيَّةَ سَتَتَطَوَّرُ.</a:t>
@@ -6350,6 +6368,7 @@
                   <a:srgbClr val="D4AF37"/>
                 </a:solidFill>
                 <a:latin typeface="Amiri" pitchFamily="2" charset="-78"/>
+                <a:ea typeface="Amiri" pitchFamily="2" charset="-78"/>
                 <a:cs typeface="Amiri" pitchFamily="2" charset="-78"/>
               </a:rPr>
               <a:t>م</a:t>
@@ -6670,6 +6689,7 @@
                   <a:srgbClr val="8A6D1E"/>
                 </a:solidFill>
                 <a:latin typeface="Amiri" pitchFamily="2" charset="-78"/>
+                <a:ea typeface="Amiri" pitchFamily="2" charset="-78"/>
                 <a:cs typeface="Amiri" pitchFamily="2" charset="-78"/>
               </a:rPr>
               <a:t>فَحْصٌ سَرِيعٌ</a:t>
@@ -6944,6 +6964,7 @@
                   <a:srgbClr val="1F2A37"/>
                 </a:solidFill>
                 <a:latin typeface="Amiri" pitchFamily="2" charset="-78"/>
+                <a:ea typeface="Amiri" pitchFamily="2" charset="-78"/>
                 <a:cs typeface="Amiri" pitchFamily="2" charset="-78"/>
               </a:rPr>
               <a:t>سَمَعَ</a:t>
@@ -7045,6 +7066,7 @@
                   <a:srgbClr val="1F2A37"/>
                 </a:solidFill>
                 <a:latin typeface="Amiri" pitchFamily="2" charset="-78"/>
+                <a:ea typeface="Amiri" pitchFamily="2" charset="-78"/>
                 <a:cs typeface="Amiri" pitchFamily="2" charset="-78"/>
               </a:rPr>
               <a:t>يُسْمَعُ</a:t>
@@ -7146,6 +7168,7 @@
                   <a:srgbClr val="1F2A37"/>
                 </a:solidFill>
                 <a:latin typeface="Amiri" pitchFamily="2" charset="-78"/>
+                <a:ea typeface="Amiri" pitchFamily="2" charset="-78"/>
                 <a:cs typeface="Amiri" pitchFamily="2" charset="-78"/>
               </a:rPr>
               <a:t>سُمِعَ</a:t>
@@ -7382,6 +7405,7 @@
                   <a:srgbClr val="1F2A37"/>
                 </a:solidFill>
                 <a:latin typeface="Amiri" pitchFamily="2" charset="-78"/>
+                <a:ea typeface="Amiri" pitchFamily="2" charset="-78"/>
                 <a:cs typeface="Amiri" pitchFamily="2" charset="-78"/>
               </a:rPr>
               <a:t>فُتِحَ الْبَابُ.</a:t>
@@ -7483,6 +7507,7 @@
                   <a:srgbClr val="1F2A37"/>
                 </a:solidFill>
                 <a:latin typeface="Amiri" pitchFamily="2" charset="-78"/>
+                <a:ea typeface="Amiri" pitchFamily="2" charset="-78"/>
                 <a:cs typeface="Amiri" pitchFamily="2" charset="-78"/>
               </a:rPr>
               <a:t>فَتَحَ الْبَابُ.</a:t>
@@ -7584,6 +7609,7 @@
                   <a:srgbClr val="1F2A37"/>
                 </a:solidFill>
                 <a:latin typeface="Amiri" pitchFamily="2" charset="-78"/>
+                <a:ea typeface="Amiri" pitchFamily="2" charset="-78"/>
                 <a:cs typeface="Amiri" pitchFamily="2" charset="-78"/>
               </a:rPr>
               <a:t>فُتِحَ الْبَابَ.</a:t>
@@ -7820,6 +7846,7 @@
                   <a:srgbClr val="1F2A37"/>
                 </a:solidFill>
                 <a:latin typeface="Amiri" pitchFamily="2" charset="-78"/>
+                <a:ea typeface="Amiri" pitchFamily="2" charset="-78"/>
                 <a:cs typeface="Amiri" pitchFamily="2" charset="-78"/>
               </a:rPr>
               <a:t>تَكْتُبُ الرِّسَالَةُ.</a:t>
@@ -7921,6 +7948,7 @@
                   <a:srgbClr val="1F2A37"/>
                 </a:solidFill>
                 <a:latin typeface="Amiri" pitchFamily="2" charset="-78"/>
+                <a:ea typeface="Amiri" pitchFamily="2" charset="-78"/>
                 <a:cs typeface="Amiri" pitchFamily="2" charset="-78"/>
               </a:rPr>
               <a:t>تُكْتَبُ الرِّسَالَةُ.</a:t>
@@ -8022,6 +8050,7 @@
                   <a:srgbClr val="1F2A37"/>
                 </a:solidFill>
                 <a:latin typeface="Amiri" pitchFamily="2" charset="-78"/>
+                <a:ea typeface="Amiri" pitchFamily="2" charset="-78"/>
                 <a:cs typeface="Amiri" pitchFamily="2" charset="-78"/>
               </a:rPr>
               <a:t>يُكْتَبُ الرِّسَالَةُ.</a:t>
@@ -8258,6 +8287,7 @@
                   <a:srgbClr val="1F2A37"/>
                 </a:solidFill>
                 <a:latin typeface="Amiri" pitchFamily="2" charset="-78"/>
+                <a:ea typeface="Amiri" pitchFamily="2" charset="-78"/>
                 <a:cs typeface="Amiri" pitchFamily="2" charset="-78"/>
               </a:rPr>
               <a:t>تُسْتَعْمَلُ السَّيَّارَاتُ.</a:t>
@@ -8359,6 +8389,7 @@
                   <a:srgbClr val="1F2A37"/>
                 </a:solidFill>
                 <a:latin typeface="Amiri" pitchFamily="2" charset="-78"/>
+                <a:ea typeface="Amiri" pitchFamily="2" charset="-78"/>
                 <a:cs typeface="Amiri" pitchFamily="2" charset="-78"/>
               </a:rPr>
               <a:t>يَسْتَعْمِلُ السَّيَّارَاتُ.</a:t>
@@ -8460,6 +8491,7 @@
                   <a:srgbClr val="1F2A37"/>
                 </a:solidFill>
                 <a:latin typeface="Amiri" pitchFamily="2" charset="-78"/>
+                <a:ea typeface="Amiri" pitchFamily="2" charset="-78"/>
                 <a:cs typeface="Amiri" pitchFamily="2" charset="-78"/>
               </a:rPr>
               <a:t>تَسْتَعْمِلُ السَّيَّارَاتُ.</a:t>
@@ -8593,6 +8625,7 @@
                   <a:srgbClr val="D4AF37"/>
                 </a:solidFill>
                 <a:latin typeface="Amiri" pitchFamily="2" charset="-78"/>
+                <a:ea typeface="Amiri" pitchFamily="2" charset="-78"/>
                 <a:cs typeface="Amiri" pitchFamily="2" charset="-78"/>
               </a:rPr>
               <a:t>م</a:t>
@@ -8913,6 +8946,7 @@
                   <a:srgbClr val="8A6D1E"/>
                 </a:solidFill>
                 <a:latin typeface="Amiri" pitchFamily="2" charset="-78"/>
+                <a:ea typeface="Amiri" pitchFamily="2" charset="-78"/>
                 <a:cs typeface="Amiri" pitchFamily="2" charset="-78"/>
               </a:rPr>
               <a:t>الإِجَابَاتُ وَالتَّعْلِيلُ</a:t>
@@ -9187,6 +9221,7 @@
                   <a:srgbClr val="9AA1AB"/>
                 </a:solidFill>
                 <a:latin typeface="Amiri" pitchFamily="2" charset="-78"/>
+                <a:ea typeface="Amiri" pitchFamily="2" charset="-78"/>
                 <a:cs typeface="Amiri" pitchFamily="2" charset="-78"/>
               </a:rPr>
               <a:t>سَمَعَ</a:t>
@@ -9288,6 +9323,7 @@
                   <a:srgbClr val="9AA1AB"/>
                 </a:solidFill>
                 <a:latin typeface="Amiri" pitchFamily="2" charset="-78"/>
+                <a:ea typeface="Amiri" pitchFamily="2" charset="-78"/>
                 <a:cs typeface="Amiri" pitchFamily="2" charset="-78"/>
               </a:rPr>
               <a:t>يُسْمَعُ</a:t>
@@ -9416,6 +9452,7 @@
                   <a:srgbClr val="1F2A37"/>
                 </a:solidFill>
                 <a:latin typeface="Amiri" pitchFamily="2" charset="-78"/>
+                <a:ea typeface="Amiri" pitchFamily="2" charset="-78"/>
                 <a:cs typeface="Amiri" pitchFamily="2" charset="-78"/>
               </a:rPr>
               <a:t>سُمِعَ</a:t>
@@ -9717,6 +9754,7 @@
                   <a:srgbClr val="1F2A37"/>
                 </a:solidFill>
                 <a:latin typeface="Amiri" pitchFamily="2" charset="-78"/>
+                <a:ea typeface="Amiri" pitchFamily="2" charset="-78"/>
                 <a:cs typeface="Amiri" pitchFamily="2" charset="-78"/>
               </a:rPr>
               <a:t>فُتِحَ الْبَابُ.</a:t>
@@ -9818,6 +9856,7 @@
                   <a:srgbClr val="9AA1AB"/>
                 </a:solidFill>
                 <a:latin typeface="Amiri" pitchFamily="2" charset="-78"/>
+                <a:ea typeface="Amiri" pitchFamily="2" charset="-78"/>
                 <a:cs typeface="Amiri" pitchFamily="2" charset="-78"/>
               </a:rPr>
               <a:t>فَتَحَ الْبَابُ.</a:t>
@@ -9919,6 +9958,7 @@
                   <a:srgbClr val="9AA1AB"/>
                 </a:solidFill>
                 <a:latin typeface="Amiri" pitchFamily="2" charset="-78"/>
+                <a:ea typeface="Amiri" pitchFamily="2" charset="-78"/>
                 <a:cs typeface="Amiri" pitchFamily="2" charset="-78"/>
               </a:rPr>
               <a:t>فُتِحَ الْبَابَ.</a:t>
@@ -10193,6 +10233,7 @@
                   <a:srgbClr val="9AA1AB"/>
                 </a:solidFill>
                 <a:latin typeface="Amiri" pitchFamily="2" charset="-78"/>
+                <a:ea typeface="Amiri" pitchFamily="2" charset="-78"/>
                 <a:cs typeface="Amiri" pitchFamily="2" charset="-78"/>
               </a:rPr>
               <a:t>تَكْتُبُ الرِّسَالَةُ.</a:t>
@@ -10321,6 +10362,7 @@
                   <a:srgbClr val="1F2A37"/>
                 </a:solidFill>
                 <a:latin typeface="Amiri" pitchFamily="2" charset="-78"/>
+                <a:ea typeface="Amiri" pitchFamily="2" charset="-78"/>
                 <a:cs typeface="Amiri" pitchFamily="2" charset="-78"/>
               </a:rPr>
               <a:t>تُكْتَبُ الرِّسَالَةُ.</a:t>
@@ -10422,6 +10464,7 @@
                   <a:srgbClr val="9AA1AB"/>
                 </a:solidFill>
                 <a:latin typeface="Amiri" pitchFamily="2" charset="-78"/>
+                <a:ea typeface="Amiri" pitchFamily="2" charset="-78"/>
                 <a:cs typeface="Amiri" pitchFamily="2" charset="-78"/>
               </a:rPr>
               <a:t>يُكْتَبُ الرِّسَالَةُ.</a:t>
@@ -10723,6 +10766,7 @@
                   <a:srgbClr val="1F2A37"/>
                 </a:solidFill>
                 <a:latin typeface="Amiri" pitchFamily="2" charset="-78"/>
+                <a:ea typeface="Amiri" pitchFamily="2" charset="-78"/>
                 <a:cs typeface="Amiri" pitchFamily="2" charset="-78"/>
               </a:rPr>
               <a:t>تُسْتَعْمَلُ السَّيَّارَاتُ.</a:t>
@@ -10824,6 +10868,7 @@
                   <a:srgbClr val="9AA1AB"/>
                 </a:solidFill>
                 <a:latin typeface="Amiri" pitchFamily="2" charset="-78"/>
+                <a:ea typeface="Amiri" pitchFamily="2" charset="-78"/>
                 <a:cs typeface="Amiri" pitchFamily="2" charset="-78"/>
               </a:rPr>
               <a:t>يَسْتَعْمِلُ السَّيَّارَاتُ.</a:t>
@@ -10925,6 +10970,7 @@
                   <a:srgbClr val="9AA1AB"/>
                 </a:solidFill>
                 <a:latin typeface="Amiri" pitchFamily="2" charset="-78"/>
+                <a:ea typeface="Amiri" pitchFamily="2" charset="-78"/>
                 <a:cs typeface="Amiri" pitchFamily="2" charset="-78"/>
               </a:rPr>
               <a:t>تَسْتَعْمِلُ السَّيَّارَاتُ.</a:t>
@@ -11096,6 +11142,7 @@
                   <a:srgbClr val="D4AF37"/>
                 </a:solidFill>
                 <a:latin typeface="Amiri" pitchFamily="2" charset="-78"/>
+                <a:ea typeface="Amiri" pitchFamily="2" charset="-78"/>
                 <a:cs typeface="Amiri" pitchFamily="2" charset="-78"/>
               </a:rPr>
               <a:t>م</a:t>
@@ -11416,6 +11463,7 @@
                   <a:srgbClr val="8A6D1E"/>
                 </a:solidFill>
                 <a:latin typeface="Amiri" pitchFamily="2" charset="-78"/>
+                <a:ea typeface="Amiri" pitchFamily="2" charset="-78"/>
                 <a:cs typeface="Amiri" pitchFamily="2" charset="-78"/>
               </a:rPr>
               <a:t>شَاهِدْ ثُمَّ اُكْتُبْ</a:t>
@@ -11627,6 +11675,7 @@
                   <a:srgbClr val="1B3B6F"/>
                 </a:solidFill>
                 <a:latin typeface="Amiri" pitchFamily="2" charset="-78"/>
+                <a:ea typeface="Amiri" pitchFamily="2" charset="-78"/>
                 <a:cs typeface="Amiri" pitchFamily="2" charset="-78"/>
               </a:rPr>
               <a:t>أَعْلَنَتِ الْمَدْرَسَةُ</a:t>
@@ -11876,6 +11925,7 @@
                   <a:srgbClr val="1B3B6F"/>
                 </a:solidFill>
                 <a:latin typeface="Amiri" pitchFamily="2" charset="-78"/>
+                <a:ea typeface="Amiri" pitchFamily="2" charset="-78"/>
                 <a:cs typeface="Amiri" pitchFamily="2" charset="-78"/>
               </a:rPr>
               <a:t>أُعْلِنَتِ النَّتَائِجُ</a:t>
@@ -12125,6 +12175,7 @@
                   <a:srgbClr val="1B3B6F"/>
                 </a:solidFill>
                 <a:latin typeface="Amiri" pitchFamily="2" charset="-78"/>
+                <a:ea typeface="Amiri" pitchFamily="2" charset="-78"/>
                 <a:cs typeface="Amiri" pitchFamily="2" charset="-78"/>
               </a:rPr>
               <a:t>نَشَرَتْ</a:t>
@@ -12374,6 +12425,7 @@
                   <a:srgbClr val="1B3B6F"/>
                 </a:solidFill>
                 <a:latin typeface="Amiri" pitchFamily="2" charset="-78"/>
+                <a:ea typeface="Amiri" pitchFamily="2" charset="-78"/>
                 <a:cs typeface="Amiri" pitchFamily="2" charset="-78"/>
               </a:rPr>
               <a:t>نُشِرَتْ</a:t>
@@ -12676,6 +12728,7 @@
                   <a:srgbClr val="0E7C86"/>
                 </a:solidFill>
                 <a:latin typeface="Amiri" pitchFamily="2" charset="-78"/>
+                <a:ea typeface="Amiri" pitchFamily="2" charset="-78"/>
                 <a:cs typeface="Amiri" pitchFamily="2" charset="-78"/>
               </a:rPr>
               <a:t>أُعْلِنَتِ</a:t>
@@ -12689,6 +12742,7 @@
                   <a:srgbClr val="1B3B6F"/>
                 </a:solidFill>
                 <a:latin typeface="Amiri" pitchFamily="2" charset="-78"/>
+                <a:ea typeface="Amiri" pitchFamily="2" charset="-78"/>
                 <a:cs typeface="Amiri" pitchFamily="2" charset="-78"/>
               </a:rPr>
               <a:t> النَّتَائِجُ صَبَاحَ الْيَوْمِ، وَ</a:t>
@@ -12702,6 +12756,7 @@
                   <a:srgbClr val="0E7C86"/>
                 </a:solidFill>
                 <a:latin typeface="Amiri" pitchFamily="2" charset="-78"/>
+                <a:ea typeface="Amiri" pitchFamily="2" charset="-78"/>
                 <a:cs typeface="Amiri" pitchFamily="2" charset="-78"/>
               </a:rPr>
               <a:t>نُشِرَتْ</a:t>
@@ -12715,6 +12770,7 @@
                   <a:srgbClr val="1B3B6F"/>
                 </a:solidFill>
                 <a:latin typeface="Amiri" pitchFamily="2" charset="-78"/>
+                <a:ea typeface="Amiri" pitchFamily="2" charset="-78"/>
                 <a:cs typeface="Amiri" pitchFamily="2" charset="-78"/>
               </a:rPr>
               <a:t> عَلَى مَوْقِعِ الْمَدْرَسَةِ. </a:t>
@@ -12728,6 +12784,7 @@
                   <a:srgbClr val="D6336C"/>
                 </a:solidFill>
                 <a:latin typeface="Amiri" pitchFamily="2" charset="-78"/>
+                <a:ea typeface="Amiri" pitchFamily="2" charset="-78"/>
                 <a:cs typeface="Amiri" pitchFamily="2" charset="-78"/>
               </a:rPr>
               <a:t>تُسْتَعْمَلُ</a:t>
@@ -12741,6 +12798,7 @@
                   <a:srgbClr val="1B3B6F"/>
                 </a:solidFill>
                 <a:latin typeface="Amiri" pitchFamily="2" charset="-78"/>
+                <a:ea typeface="Amiri" pitchFamily="2" charset="-78"/>
                 <a:cs typeface="Amiri" pitchFamily="2" charset="-78"/>
               </a:rPr>
               <a:t> هَذِهِ الطَّرِيقَةُ لِكَيْ يَطَّلِعَ جَمِيعُ الطُّلَّابِ عَلَيْهَا.</a:t>
@@ -12912,6 +12970,7 @@
                   <a:srgbClr val="D4AF37"/>
                 </a:solidFill>
                 <a:latin typeface="Amiri" pitchFamily="2" charset="-78"/>
+                <a:ea typeface="Amiri" pitchFamily="2" charset="-78"/>
                 <a:cs typeface="Amiri" pitchFamily="2" charset="-78"/>
               </a:rPr>
               <a:t>م</a:t>
@@ -13232,6 +13291,7 @@
                   <a:srgbClr val="8A6D1E"/>
                 </a:solidFill>
                 <a:latin typeface="Amiri" pitchFamily="2" charset="-78"/>
+                <a:ea typeface="Amiri" pitchFamily="2" charset="-78"/>
                 <a:cs typeface="Amiri" pitchFamily="2" charset="-78"/>
               </a:rPr>
               <a:t>جُمَلٌ نَمُوذَجِيَّةٌ</a:t>
@@ -13405,6 +13465,7 @@
                   <a:srgbClr val="1B3B6F"/>
                 </a:solidFill>
                 <a:latin typeface="Amiri" pitchFamily="2" charset="-78"/>
+                <a:ea typeface="Amiri" pitchFamily="2" charset="-78"/>
                 <a:cs typeface="Amiri" pitchFamily="2" charset="-78"/>
               </a:rPr>
               <a:t>يُمْنَعُ الدُّخُولُ.</a:t>
@@ -13594,6 +13655,7 @@
                   <a:srgbClr val="1B3B6F"/>
                 </a:solidFill>
                 <a:latin typeface="Amiri" pitchFamily="2" charset="-78"/>
+                <a:ea typeface="Amiri" pitchFamily="2" charset="-78"/>
                 <a:cs typeface="Amiri" pitchFamily="2" charset="-78"/>
               </a:rPr>
               <a:t>سُرِقَ الْهَاتِفُ.</a:t>
@@ -13783,6 +13845,7 @@
                   <a:srgbClr val="1B3B6F"/>
                 </a:solidFill>
                 <a:latin typeface="Amiri" pitchFamily="2" charset="-78"/>
+                <a:ea typeface="Amiri" pitchFamily="2" charset="-78"/>
                 <a:cs typeface="Amiri" pitchFamily="2" charset="-78"/>
               </a:rPr>
               <a:t>تُغْسَلُ الْفَوَاكِهُ قَبْلَ الْأَكْلِ.</a:t>
@@ -13972,6 +14035,7 @@
                   <a:srgbClr val="1B3B6F"/>
                 </a:solidFill>
                 <a:latin typeface="Amiri" pitchFamily="2" charset="-78"/>
+                <a:ea typeface="Amiri" pitchFamily="2" charset="-78"/>
                 <a:cs typeface="Amiri" pitchFamily="2" charset="-78"/>
               </a:rPr>
               <a:t>صَحَّحَتِ الْمُعَلِّمَةُ الْعَمَلَ.</a:t>
@@ -14159,6 +14223,7 @@
                   <a:srgbClr val="D4AF37"/>
                 </a:solidFill>
                 <a:latin typeface="Amiri" pitchFamily="2" charset="-78"/>
+                <a:ea typeface="Amiri" pitchFamily="2" charset="-78"/>
                 <a:cs typeface="Amiri" pitchFamily="2" charset="-78"/>
               </a:rPr>
               <a:t>م</a:t>
@@ -14479,6 +14544,7 @@
                   <a:srgbClr val="8A6D1E"/>
                 </a:solidFill>
                 <a:latin typeface="Amiri" pitchFamily="2" charset="-78"/>
+                <a:ea typeface="Amiri" pitchFamily="2" charset="-78"/>
                 <a:cs typeface="Amiri" pitchFamily="2" charset="-78"/>
               </a:rPr>
               <a:t>حَوِّلْ إِلَى الْمَجْهُولِ</a:t>
@@ -14759,6 +14825,7 @@
                   <a:srgbClr val="1B3B6F"/>
                 </a:solidFill>
                 <a:latin typeface="Amiri" pitchFamily="2" charset="-78"/>
+                <a:ea typeface="Amiri" pitchFamily="2" charset="-78"/>
                 <a:cs typeface="Amiri" pitchFamily="2" charset="-78"/>
               </a:rPr>
               <a:t>فُتِحَ الْبَابُ.</a:t>
@@ -14797,6 +14864,7 @@
                   <a:srgbClr val="1B3B6F"/>
                 </a:solidFill>
                 <a:latin typeface="Amiri" pitchFamily="2" charset="-78"/>
+                <a:ea typeface="Amiri" pitchFamily="2" charset="-78"/>
                 <a:cs typeface="Amiri" pitchFamily="2" charset="-78"/>
               </a:rPr>
               <a:t>فَتَحَ الْحَارِسُ الْبَابَ.</a:t>
@@ -14965,6 +15033,7 @@
                   <a:srgbClr val="1B3B6F"/>
                 </a:solidFill>
                 <a:latin typeface="Amiri" pitchFamily="2" charset="-78"/>
+                <a:ea typeface="Amiri" pitchFamily="2" charset="-78"/>
                 <a:cs typeface="Amiri" pitchFamily="2" charset="-78"/>
               </a:rPr>
               <a:t>كُسِرَتِ النَّافِذَةُ.</a:t>
@@ -15003,6 +15072,7 @@
                   <a:srgbClr val="1B3B6F"/>
                 </a:solidFill>
                 <a:latin typeface="Amiri" pitchFamily="2" charset="-78"/>
+                <a:ea typeface="Amiri" pitchFamily="2" charset="-78"/>
                 <a:cs typeface="Amiri" pitchFamily="2" charset="-78"/>
               </a:rPr>
               <a:t>كَسَرَ الْوَلَدُ النَّافِذَةَ.</a:t>
@@ -15171,6 +15241,7 @@
                   <a:srgbClr val="1B3B6F"/>
                 </a:solidFill>
                 <a:latin typeface="Amiri" pitchFamily="2" charset="-78"/>
+                <a:ea typeface="Amiri" pitchFamily="2" charset="-78"/>
                 <a:cs typeface="Amiri" pitchFamily="2" charset="-78"/>
               </a:rPr>
               <a:t>تُقْرَأُ الْكُتُبُ.</a:t>
@@ -15209,6 +15280,7 @@
                   <a:srgbClr val="1B3B6F"/>
                 </a:solidFill>
                 <a:latin typeface="Amiri" pitchFamily="2" charset="-78"/>
+                <a:ea typeface="Amiri" pitchFamily="2" charset="-78"/>
                 <a:cs typeface="Amiri" pitchFamily="2" charset="-78"/>
               </a:rPr>
               <a:t>يَقْرَأُ الطُّلَّابُ الْكُتُبَ.</a:t>
@@ -15312,6 +15384,7 @@
                   <a:srgbClr val="1B3B6F"/>
                 </a:solidFill>
                 <a:latin typeface="Amiri" pitchFamily="2" charset="-78"/>
+                <a:ea typeface="Amiri" pitchFamily="2" charset="-78"/>
                 <a:cs typeface="Amiri" pitchFamily="2" charset="-78"/>
               </a:rPr>
               <a:t>مُنِعَ التَّدْخِينُ.</a:t>
@@ -15350,6 +15423,7 @@
                   <a:srgbClr val="1B3B6F"/>
                 </a:solidFill>
                 <a:latin typeface="Amiri" pitchFamily="2" charset="-78"/>
+                <a:ea typeface="Amiri" pitchFamily="2" charset="-78"/>
                 <a:cs typeface="Amiri" pitchFamily="2" charset="-78"/>
               </a:rPr>
               <a:t>مَنَعَ الْقَانُونُ التَّدْخِينَ.</a:t>
@@ -15453,6 +15527,7 @@
                   <a:srgbClr val="1B3B6F"/>
                 </a:solidFill>
                 <a:latin typeface="Amiri" pitchFamily="2" charset="-78"/>
+                <a:ea typeface="Amiri" pitchFamily="2" charset="-78"/>
                 <a:cs typeface="Amiri" pitchFamily="2" charset="-78"/>
               </a:rPr>
               <a:t>تُفْحَصُ الْحَقَائِبُ.</a:t>
@@ -15491,6 +15566,7 @@
                   <a:srgbClr val="1B3B6F"/>
                 </a:solidFill>
                 <a:latin typeface="Amiri" pitchFamily="2" charset="-78"/>
+                <a:ea typeface="Amiri" pitchFamily="2" charset="-78"/>
                 <a:cs typeface="Amiri" pitchFamily="2" charset="-78"/>
               </a:rPr>
               <a:t>يَفْحَصُ الْمُوَظَّفُ الْحَقَائِبَ.</a:t>
@@ -15594,6 +15670,7 @@
                   <a:srgbClr val="1B3B6F"/>
                 </a:solidFill>
                 <a:latin typeface="Amiri" pitchFamily="2" charset="-78"/>
+                <a:ea typeface="Amiri" pitchFamily="2" charset="-78"/>
                 <a:cs typeface="Amiri" pitchFamily="2" charset="-78"/>
               </a:rPr>
               <a:t>تُسْتَعْمَلُ الْهَوَاتِفُ.</a:t>
@@ -15632,6 +15709,7 @@
                   <a:srgbClr val="1B3B6F"/>
                 </a:solidFill>
                 <a:latin typeface="Amiri" pitchFamily="2" charset="-78"/>
+                <a:ea typeface="Amiri" pitchFamily="2" charset="-78"/>
                 <a:cs typeface="Amiri" pitchFamily="2" charset="-78"/>
               </a:rPr>
               <a:t>يَسْتَعْمِلُ النَّاسُ الْهَوَاتِفَ.</a:t>
@@ -15803,6 +15881,7 @@
                   <a:srgbClr val="D4AF37"/>
                 </a:solidFill>
                 <a:latin typeface="Amiri" pitchFamily="2" charset="-78"/>
+                <a:ea typeface="Amiri" pitchFamily="2" charset="-78"/>
                 <a:cs typeface="Amiri" pitchFamily="2" charset="-78"/>
               </a:rPr>
               <a:t>م</a:t>
@@ -16123,6 +16202,7 @@
                   <a:srgbClr val="8A6D1E"/>
                 </a:solidFill>
                 <a:latin typeface="Amiri" pitchFamily="2" charset="-78"/>
+                <a:ea typeface="Amiri" pitchFamily="2" charset="-78"/>
                 <a:cs typeface="Amiri" pitchFamily="2" charset="-78"/>
               </a:rPr>
               <a:t>مَعْلُومٌ أَمْ مَجْهُولٌ؟</a:t>
@@ -16233,6 +16313,7 @@
                   <a:srgbClr val="1B3B6F"/>
                 </a:solidFill>
                 <a:latin typeface="Amiri" pitchFamily="2" charset="-78"/>
+                <a:ea typeface="Amiri" pitchFamily="2" charset="-78"/>
                 <a:cs typeface="Amiri" pitchFamily="2" charset="-78"/>
               </a:rPr>
               <a:t>كَتَبَ</a:t>
@@ -16305,6 +16386,7 @@
                   <a:srgbClr val="1B3B6F"/>
                 </a:solidFill>
                 <a:latin typeface="Amiri" pitchFamily="2" charset="-78"/>
+                <a:ea typeface="Amiri" pitchFamily="2" charset="-78"/>
                 <a:cs typeface="Amiri" pitchFamily="2" charset="-78"/>
               </a:rPr>
               <a:t>يَفْتَحُ</a:t>
@@ -16377,6 +16459,7 @@
                   <a:srgbClr val="1B3B6F"/>
                 </a:solidFill>
                 <a:latin typeface="Amiri" pitchFamily="2" charset="-78"/>
+                <a:ea typeface="Amiri" pitchFamily="2" charset="-78"/>
                 <a:cs typeface="Amiri" pitchFamily="2" charset="-78"/>
               </a:rPr>
               <a:t>تَكْتُبُ</a:t>
@@ -16449,6 +16532,7 @@
                   <a:srgbClr val="1B3B6F"/>
                 </a:solidFill>
                 <a:latin typeface="Amiri" pitchFamily="2" charset="-78"/>
+                <a:ea typeface="Amiri" pitchFamily="2" charset="-78"/>
                 <a:cs typeface="Amiri" pitchFamily="2" charset="-78"/>
               </a:rPr>
               <a:t>أَعْلَنَتْ</a:t>
@@ -16521,6 +16605,7 @@
                   <a:srgbClr val="1B3B6F"/>
                 </a:solidFill>
                 <a:latin typeface="Amiri" pitchFamily="2" charset="-78"/>
+                <a:ea typeface="Amiri" pitchFamily="2" charset="-78"/>
                 <a:cs typeface="Amiri" pitchFamily="2" charset="-78"/>
               </a:rPr>
               <a:t>كُتِبَ</a:t>
@@ -16593,6 +16678,7 @@
                   <a:srgbClr val="1B3B6F"/>
                 </a:solidFill>
                 <a:latin typeface="Amiri" pitchFamily="2" charset="-78"/>
+                <a:ea typeface="Amiri" pitchFamily="2" charset="-78"/>
                 <a:cs typeface="Amiri" pitchFamily="2" charset="-78"/>
               </a:rPr>
               <a:t>يُفْتَحُ</a:t>
@@ -16665,6 +16751,7 @@
                   <a:srgbClr val="1B3B6F"/>
                 </a:solidFill>
                 <a:latin typeface="Amiri" pitchFamily="2" charset="-78"/>
+                <a:ea typeface="Amiri" pitchFamily="2" charset="-78"/>
                 <a:cs typeface="Amiri" pitchFamily="2" charset="-78"/>
               </a:rPr>
               <a:t>تُكْتَبُ</a:t>
@@ -16737,6 +16824,7 @@
                   <a:srgbClr val="1B3B6F"/>
                 </a:solidFill>
                 <a:latin typeface="Amiri" pitchFamily="2" charset="-78"/>
+                <a:ea typeface="Amiri" pitchFamily="2" charset="-78"/>
                 <a:cs typeface="Amiri" pitchFamily="2" charset="-78"/>
               </a:rPr>
               <a:t>أُعْلِنَتْ</a:t>
@@ -17054,6 +17142,7 @@
                   <a:srgbClr val="D4AF37"/>
                 </a:solidFill>
                 <a:latin typeface="Amiri" pitchFamily="2" charset="-78"/>
+                <a:ea typeface="Amiri" pitchFamily="2" charset="-78"/>
                 <a:cs typeface="Amiri" pitchFamily="2" charset="-78"/>
               </a:rPr>
               <a:t>م</a:t>
@@ -17374,6 +17463,7 @@
                   <a:srgbClr val="8A6D1E"/>
                 </a:solidFill>
                 <a:latin typeface="Amiri" pitchFamily="2" charset="-78"/>
+                <a:ea typeface="Amiri" pitchFamily="2" charset="-78"/>
                 <a:cs typeface="Amiri" pitchFamily="2" charset="-78"/>
               </a:rPr>
               <a:t>الإِجَابَاتُ</a:t>
@@ -17569,6 +17659,7 @@
                   <a:srgbClr val="1B3B6F"/>
                 </a:solidFill>
                 <a:latin typeface="Amiri" pitchFamily="2" charset="-78"/>
+                <a:ea typeface="Amiri" pitchFamily="2" charset="-78"/>
                 <a:cs typeface="Amiri" pitchFamily="2" charset="-78"/>
               </a:rPr>
               <a:t>كَتَبَ</a:t>
@@ -17634,6 +17725,7 @@
                   <a:srgbClr val="1B3B6F"/>
                 </a:solidFill>
                 <a:latin typeface="Amiri" pitchFamily="2" charset="-78"/>
+                <a:ea typeface="Amiri" pitchFamily="2" charset="-78"/>
                 <a:cs typeface="Amiri" pitchFamily="2" charset="-78"/>
               </a:rPr>
               <a:t>يَفْتَحُ</a:t>
@@ -17699,6 +17791,7 @@
                   <a:srgbClr val="1B3B6F"/>
                 </a:solidFill>
                 <a:latin typeface="Amiri" pitchFamily="2" charset="-78"/>
+                <a:ea typeface="Amiri" pitchFamily="2" charset="-78"/>
                 <a:cs typeface="Amiri" pitchFamily="2" charset="-78"/>
               </a:rPr>
               <a:t>تَكْتُبُ</a:t>
@@ -17764,6 +17857,7 @@
                   <a:srgbClr val="1B3B6F"/>
                 </a:solidFill>
                 <a:latin typeface="Amiri" pitchFamily="2" charset="-78"/>
+                <a:ea typeface="Amiri" pitchFamily="2" charset="-78"/>
                 <a:cs typeface="Amiri" pitchFamily="2" charset="-78"/>
               </a:rPr>
               <a:t>أَعْلَنَتْ</a:t>
@@ -17921,6 +18015,7 @@
                   <a:srgbClr val="1B3B6F"/>
                 </a:solidFill>
                 <a:latin typeface="Amiri" pitchFamily="2" charset="-78"/>
+                <a:ea typeface="Amiri" pitchFamily="2" charset="-78"/>
                 <a:cs typeface="Amiri" pitchFamily="2" charset="-78"/>
               </a:rPr>
               <a:t>كُتِبَ</a:t>
@@ -17986,6 +18081,7 @@
                   <a:srgbClr val="1B3B6F"/>
                 </a:solidFill>
                 <a:latin typeface="Amiri" pitchFamily="2" charset="-78"/>
+                <a:ea typeface="Amiri" pitchFamily="2" charset="-78"/>
                 <a:cs typeface="Amiri" pitchFamily="2" charset="-78"/>
               </a:rPr>
               <a:t>يُفْتَحُ</a:t>
@@ -18051,6 +18147,7 @@
                   <a:srgbClr val="1B3B6F"/>
                 </a:solidFill>
                 <a:latin typeface="Amiri" pitchFamily="2" charset="-78"/>
+                <a:ea typeface="Amiri" pitchFamily="2" charset="-78"/>
                 <a:cs typeface="Amiri" pitchFamily="2" charset="-78"/>
               </a:rPr>
               <a:t>تُكْتَبُ</a:t>
@@ -18116,6 +18213,7 @@
                   <a:srgbClr val="1B3B6F"/>
                 </a:solidFill>
                 <a:latin typeface="Amiri" pitchFamily="2" charset="-78"/>
+                <a:ea typeface="Amiri" pitchFamily="2" charset="-78"/>
                 <a:cs typeface="Amiri" pitchFamily="2" charset="-78"/>
               </a:rPr>
               <a:t>أُعْلِنَتْ</a:t>
@@ -18249,6 +18347,7 @@
                   <a:srgbClr val="D4AF37"/>
                 </a:solidFill>
                 <a:latin typeface="Amiri" pitchFamily="2" charset="-78"/>
+                <a:ea typeface="Amiri" pitchFamily="2" charset="-78"/>
                 <a:cs typeface="Amiri" pitchFamily="2" charset="-78"/>
               </a:rPr>
               <a:t>م</a:t>
@@ -18569,6 +18668,7 @@
                   <a:srgbClr val="8A6D1E"/>
                 </a:solidFill>
                 <a:latin typeface="Amiri" pitchFamily="2" charset="-78"/>
+                <a:ea typeface="Amiri" pitchFamily="2" charset="-78"/>
                 <a:cs typeface="Amiri" pitchFamily="2" charset="-78"/>
               </a:rPr>
               <a:t>صَحِّحِ الخَطَأَ</a:t>
@@ -18742,6 +18842,7 @@
                   <a:srgbClr val="B83227"/>
                 </a:solidFill>
                 <a:latin typeface="Amiri" pitchFamily="2" charset="-78"/>
+                <a:ea typeface="Amiri" pitchFamily="2" charset="-78"/>
                 <a:cs typeface="Amiri" pitchFamily="2" charset="-78"/>
               </a:rPr>
               <a:t>يَفْتَحُ الْبَابُ</a:t>
@@ -18915,6 +19016,7 @@
                   <a:srgbClr val="B83227"/>
                 </a:solidFill>
                 <a:latin typeface="Amiri" pitchFamily="2" charset="-78"/>
+                <a:ea typeface="Amiri" pitchFamily="2" charset="-78"/>
                 <a:cs typeface="Amiri" pitchFamily="2" charset="-78"/>
               </a:rPr>
               <a:t>كُسِرَ الزُّجَاجَ</a:t>
@@ -19088,6 +19190,7 @@
                   <a:srgbClr val="B83227"/>
                 </a:solidFill>
                 <a:latin typeface="Amiri" pitchFamily="2" charset="-78"/>
+                <a:ea typeface="Amiri" pitchFamily="2" charset="-78"/>
                 <a:cs typeface="Amiri" pitchFamily="2" charset="-78"/>
               </a:rPr>
               <a:t>يُكْتَبُ الرِّسَالَةُ</a:t>
@@ -19259,6 +19362,7 @@
                   <a:srgbClr val="D4AF37"/>
                 </a:solidFill>
                 <a:latin typeface="Amiri" pitchFamily="2" charset="-78"/>
+                <a:ea typeface="Amiri" pitchFamily="2" charset="-78"/>
                 <a:cs typeface="Amiri" pitchFamily="2" charset="-78"/>
               </a:rPr>
               <a:t>م</a:t>
@@ -19579,6 +19683,7 @@
                   <a:srgbClr val="8A6D1E"/>
                 </a:solidFill>
                 <a:latin typeface="Amiri" pitchFamily="2" charset="-78"/>
+                <a:ea typeface="Amiri" pitchFamily="2" charset="-78"/>
                 <a:cs typeface="Amiri" pitchFamily="2" charset="-78"/>
               </a:rPr>
               <a:t>التَّصْحِيحُ وَالسَّبَبُ</a:t>
@@ -19689,6 +19794,7 @@
                   <a:srgbClr val="B83227"/>
                 </a:solidFill>
                 <a:latin typeface="Amiri" pitchFamily="2" charset="-78"/>
+                <a:ea typeface="Amiri" pitchFamily="2" charset="-78"/>
                 <a:cs typeface="Amiri" pitchFamily="2" charset="-78"/>
               </a:rPr>
               <a:t>يَفْتَحُ الْبَابُ</a:t>
@@ -19788,6 +19894,7 @@
                   <a:srgbClr val="1E6B52"/>
                 </a:solidFill>
                 <a:latin typeface="Amiri" pitchFamily="2" charset="-78"/>
+                <a:ea typeface="Amiri" pitchFamily="2" charset="-78"/>
                 <a:cs typeface="Amiri" pitchFamily="2" charset="-78"/>
               </a:rPr>
               <a:t>يُفْتَحُ الْبَابُ</a:t>
@@ -19898,6 +20005,7 @@
                   <a:srgbClr val="B83227"/>
                 </a:solidFill>
                 <a:latin typeface="Amiri" pitchFamily="2" charset="-78"/>
+                <a:ea typeface="Amiri" pitchFamily="2" charset="-78"/>
                 <a:cs typeface="Amiri" pitchFamily="2" charset="-78"/>
               </a:rPr>
               <a:t>كُسِرَ الزُّجَاجَ</a:t>
@@ -19997,6 +20105,7 @@
                   <a:srgbClr val="1E6B52"/>
                 </a:solidFill>
                 <a:latin typeface="Amiri" pitchFamily="2" charset="-78"/>
+                <a:ea typeface="Amiri" pitchFamily="2" charset="-78"/>
                 <a:cs typeface="Amiri" pitchFamily="2" charset="-78"/>
               </a:rPr>
               <a:t>كُسِرَ الزُّجَاجُ</a:t>
@@ -20107,6 +20216,7 @@
                   <a:srgbClr val="B83227"/>
                 </a:solidFill>
                 <a:latin typeface="Amiri" pitchFamily="2" charset="-78"/>
+                <a:ea typeface="Amiri" pitchFamily="2" charset="-78"/>
                 <a:cs typeface="Amiri" pitchFamily="2" charset="-78"/>
               </a:rPr>
               <a:t>يُكْتَبُ الرِّسَالَةُ</a:t>
@@ -20206,6 +20316,7 @@
                   <a:srgbClr val="1E6B52"/>
                 </a:solidFill>
                 <a:latin typeface="Amiri" pitchFamily="2" charset="-78"/>
+                <a:ea typeface="Amiri" pitchFamily="2" charset="-78"/>
                 <a:cs typeface="Amiri" pitchFamily="2" charset="-78"/>
               </a:rPr>
               <a:t>تُكْتَبُ الرِّسَالَةُ</a:t>
@@ -20377,6 +20488,7 @@
                   <a:srgbClr val="D4AF37"/>
                 </a:solidFill>
                 <a:latin typeface="Amiri" pitchFamily="2" charset="-78"/>
+                <a:ea typeface="Amiri" pitchFamily="2" charset="-78"/>
                 <a:cs typeface="Amiri" pitchFamily="2" charset="-78"/>
               </a:rPr>
               <a:t>م</a:t>
@@ -20697,6 +20809,7 @@
                   <a:srgbClr val="8A6D1E"/>
                 </a:solidFill>
                 <a:latin typeface="Amiri" pitchFamily="2" charset="-78"/>
+                <a:ea typeface="Amiri" pitchFamily="2" charset="-78"/>
                 <a:cs typeface="Amiri" pitchFamily="2" charset="-78"/>
               </a:rPr>
               <a:t>آدَابُ الصَّفِّ</a:t>
@@ -22228,6 +22341,7 @@
                   <a:srgbClr val="D4AF37"/>
                 </a:solidFill>
                 <a:latin typeface="Amiri" pitchFamily="2" charset="-78"/>
+                <a:ea typeface="Amiri" pitchFamily="2" charset="-78"/>
                 <a:cs typeface="Amiri" pitchFamily="2" charset="-78"/>
               </a:rPr>
               <a:t>م</a:t>
@@ -22613,6 +22727,7 @@
                   <a:srgbClr val="8A6D1E"/>
                 </a:solidFill>
                 <a:latin typeface="Amiri" pitchFamily="2" charset="-78"/>
+                <a:ea typeface="Amiri" pitchFamily="2" charset="-78"/>
                 <a:cs typeface="Amiri" pitchFamily="2" charset="-78"/>
               </a:rPr>
               <a:t>تَدْرِيبٌ إِضَافِيٌّ</a:t>
@@ -22887,6 +23002,7 @@
                   <a:srgbClr val="1F2A37"/>
                 </a:solidFill>
                 <a:latin typeface="Amiri" pitchFamily="2" charset="-78"/>
+                <a:ea typeface="Amiri" pitchFamily="2" charset="-78"/>
                 <a:cs typeface="Amiri" pitchFamily="2" charset="-78"/>
               </a:rPr>
               <a:t>قَرَأَتِ الْكُتُبَ.</a:t>
@@ -22988,6 +23104,7 @@
                   <a:srgbClr val="1F2A37"/>
                 </a:solidFill>
                 <a:latin typeface="Amiri" pitchFamily="2" charset="-78"/>
+                <a:ea typeface="Amiri" pitchFamily="2" charset="-78"/>
                 <a:cs typeface="Amiri" pitchFamily="2" charset="-78"/>
               </a:rPr>
               <a:t>تُقْرَأُ الْكُتُبُ.</a:t>
@@ -23089,6 +23206,7 @@
                   <a:srgbClr val="1F2A37"/>
                 </a:solidFill>
                 <a:latin typeface="Amiri" pitchFamily="2" charset="-78"/>
+                <a:ea typeface="Amiri" pitchFamily="2" charset="-78"/>
                 <a:cs typeface="Amiri" pitchFamily="2" charset="-78"/>
               </a:rPr>
               <a:t>قُرِئَتِ الْكُتُبُ.</a:t>
@@ -23325,6 +23443,7 @@
                   <a:srgbClr val="1F2A37"/>
                 </a:solidFill>
                 <a:latin typeface="Amiri" pitchFamily="2" charset="-78"/>
+                <a:ea typeface="Amiri" pitchFamily="2" charset="-78"/>
                 <a:cs typeface="Amiri" pitchFamily="2" charset="-78"/>
               </a:rPr>
               <a:t>يَمْنَعُ الدُّخُولُ نَفْسَهُ.</a:t>
@@ -23426,6 +23545,7 @@
                   <a:srgbClr val="1F2A37"/>
                 </a:solidFill>
                 <a:latin typeface="Amiri" pitchFamily="2" charset="-78"/>
+                <a:ea typeface="Amiri" pitchFamily="2" charset="-78"/>
                 <a:cs typeface="Amiri" pitchFamily="2" charset="-78"/>
               </a:rPr>
               <a:t>يُمْنَعُ الدُّخُولُ.</a:t>
@@ -23527,6 +23647,7 @@
                   <a:srgbClr val="1F2A37"/>
                 </a:solidFill>
                 <a:latin typeface="Amiri" pitchFamily="2" charset="-78"/>
+                <a:ea typeface="Amiri" pitchFamily="2" charset="-78"/>
                 <a:cs typeface="Amiri" pitchFamily="2" charset="-78"/>
               </a:rPr>
               <a:t>مَنَعْتُ الدُّخُولَ أَمْسِ.</a:t>
@@ -23763,6 +23884,7 @@
                   <a:srgbClr val="1F2A37"/>
                 </a:solidFill>
                 <a:latin typeface="Amiri" pitchFamily="2" charset="-78"/>
+                <a:ea typeface="Amiri" pitchFamily="2" charset="-78"/>
                 <a:cs typeface="Amiri" pitchFamily="2" charset="-78"/>
               </a:rPr>
               <a:t>تَغْسِلُ الْفَوَاكِهُ نَفْسَهَا.</a:t>
@@ -23864,6 +23986,7 @@
                   <a:srgbClr val="1F2A37"/>
                 </a:solidFill>
                 <a:latin typeface="Amiri" pitchFamily="2" charset="-78"/>
+                <a:ea typeface="Amiri" pitchFamily="2" charset="-78"/>
                 <a:cs typeface="Amiri" pitchFamily="2" charset="-78"/>
               </a:rPr>
               <a:t>تُغْسَلُ الْفَوَاكِهُ قَبْلَ الْأَكْلِ.</a:t>
@@ -23965,6 +24088,7 @@
                   <a:srgbClr val="1F2A37"/>
                 </a:solidFill>
                 <a:latin typeface="Amiri" pitchFamily="2" charset="-78"/>
+                <a:ea typeface="Amiri" pitchFamily="2" charset="-78"/>
                 <a:cs typeface="Amiri" pitchFamily="2" charset="-78"/>
               </a:rPr>
               <a:t>غَسَلَتْ الْفَوَاكِهُ.</a:t>
@@ -24201,6 +24325,7 @@
                   <a:srgbClr val="1F2A37"/>
                 </a:solidFill>
                 <a:latin typeface="Amiri" pitchFamily="2" charset="-78"/>
+                <a:ea typeface="Amiri" pitchFamily="2" charset="-78"/>
                 <a:cs typeface="Amiri" pitchFamily="2" charset="-78"/>
               </a:rPr>
               <a:t>يَقْرَأُ الْكُتُبُ.</a:t>
@@ -24302,6 +24427,7 @@
                   <a:srgbClr val="1F2A37"/>
                 </a:solidFill>
                 <a:latin typeface="Amiri" pitchFamily="2" charset="-78"/>
+                <a:ea typeface="Amiri" pitchFamily="2" charset="-78"/>
                 <a:cs typeface="Amiri" pitchFamily="2" charset="-78"/>
               </a:rPr>
               <a:t>تُقْرَأُ الْكُتُبَ.</a:t>
@@ -24403,6 +24529,7 @@
                   <a:srgbClr val="1F2A37"/>
                 </a:solidFill>
                 <a:latin typeface="Amiri" pitchFamily="2" charset="-78"/>
+                <a:ea typeface="Amiri" pitchFamily="2" charset="-78"/>
                 <a:cs typeface="Amiri" pitchFamily="2" charset="-78"/>
               </a:rPr>
               <a:t>تُقْرَأُ الْكُتُبُ.</a:t>
@@ -24536,6 +24663,7 @@
                   <a:srgbClr val="D4AF37"/>
                 </a:solidFill>
                 <a:latin typeface="Amiri" pitchFamily="2" charset="-78"/>
+                <a:ea typeface="Amiri" pitchFamily="2" charset="-78"/>
                 <a:cs typeface="Amiri" pitchFamily="2" charset="-78"/>
               </a:rPr>
               <a:t>م</a:t>
@@ -24921,6 +25049,7 @@
                   <a:srgbClr val="8A6D1E"/>
                 </a:solidFill>
                 <a:latin typeface="Amiri" pitchFamily="2" charset="-78"/>
+                <a:ea typeface="Amiri" pitchFamily="2" charset="-78"/>
                 <a:cs typeface="Amiri" pitchFamily="2" charset="-78"/>
               </a:rPr>
               <a:t>الإِجَابَاتُ وَالتَّعْلِيلُ</a:t>
@@ -25195,6 +25324,7 @@
                   <a:srgbClr val="9AA1AB"/>
                 </a:solidFill>
                 <a:latin typeface="Amiri" pitchFamily="2" charset="-78"/>
+                <a:ea typeface="Amiri" pitchFamily="2" charset="-78"/>
                 <a:cs typeface="Amiri" pitchFamily="2" charset="-78"/>
               </a:rPr>
               <a:t>قَرَأَتِ الْكُتُبَ.</a:t>
@@ -25296,6 +25426,7 @@
                   <a:srgbClr val="9AA1AB"/>
                 </a:solidFill>
                 <a:latin typeface="Amiri" pitchFamily="2" charset="-78"/>
+                <a:ea typeface="Amiri" pitchFamily="2" charset="-78"/>
                 <a:cs typeface="Amiri" pitchFamily="2" charset="-78"/>
               </a:rPr>
               <a:t>تُقْرَأُ الْكُتُبُ.</a:t>
@@ -25424,6 +25555,7 @@
                   <a:srgbClr val="1F2A37"/>
                 </a:solidFill>
                 <a:latin typeface="Amiri" pitchFamily="2" charset="-78"/>
+                <a:ea typeface="Amiri" pitchFamily="2" charset="-78"/>
                 <a:cs typeface="Amiri" pitchFamily="2" charset="-78"/>
               </a:rPr>
               <a:t>قُرِئَتِ الْكُتُبُ.</a:t>
@@ -25698,6 +25830,7 @@
                   <a:srgbClr val="9AA1AB"/>
                 </a:solidFill>
                 <a:latin typeface="Amiri" pitchFamily="2" charset="-78"/>
+                <a:ea typeface="Amiri" pitchFamily="2" charset="-78"/>
                 <a:cs typeface="Amiri" pitchFamily="2" charset="-78"/>
               </a:rPr>
               <a:t>يَمْنَعُ الدُّخُولُ نَفْسَهُ.</a:t>
@@ -25826,6 +25959,7 @@
                   <a:srgbClr val="1F2A37"/>
                 </a:solidFill>
                 <a:latin typeface="Amiri" pitchFamily="2" charset="-78"/>
+                <a:ea typeface="Amiri" pitchFamily="2" charset="-78"/>
                 <a:cs typeface="Amiri" pitchFamily="2" charset="-78"/>
               </a:rPr>
               <a:t>يُمْنَعُ الدُّخُولُ.</a:t>
@@ -25927,6 +26061,7 @@
                   <a:srgbClr val="9AA1AB"/>
                 </a:solidFill>
                 <a:latin typeface="Amiri" pitchFamily="2" charset="-78"/>
+                <a:ea typeface="Amiri" pitchFamily="2" charset="-78"/>
                 <a:cs typeface="Amiri" pitchFamily="2" charset="-78"/>
               </a:rPr>
               <a:t>مَنَعْتُ الدُّخُولَ أَمْسِ.</a:t>
@@ -26201,6 +26336,7 @@
                   <a:srgbClr val="9AA1AB"/>
                 </a:solidFill>
                 <a:latin typeface="Amiri" pitchFamily="2" charset="-78"/>
+                <a:ea typeface="Amiri" pitchFamily="2" charset="-78"/>
                 <a:cs typeface="Amiri" pitchFamily="2" charset="-78"/>
               </a:rPr>
               <a:t>تَغْسِلُ الْفَوَاكِهُ نَفْسَهَا.</a:t>
@@ -26329,6 +26465,7 @@
                   <a:srgbClr val="1F2A37"/>
                 </a:solidFill>
                 <a:latin typeface="Amiri" pitchFamily="2" charset="-78"/>
+                <a:ea typeface="Amiri" pitchFamily="2" charset="-78"/>
                 <a:cs typeface="Amiri" pitchFamily="2" charset="-78"/>
               </a:rPr>
               <a:t>تُغْسَلُ الْفَوَاكِهُ قَبْلَ الْأَكْلِ.</a:t>
@@ -26430,6 +26567,7 @@
                   <a:srgbClr val="9AA1AB"/>
                 </a:solidFill>
                 <a:latin typeface="Amiri" pitchFamily="2" charset="-78"/>
+                <a:ea typeface="Amiri" pitchFamily="2" charset="-78"/>
                 <a:cs typeface="Amiri" pitchFamily="2" charset="-78"/>
               </a:rPr>
               <a:t>غَسَلَتْ الْفَوَاكِهُ.</a:t>
@@ -26704,6 +26842,7 @@
                   <a:srgbClr val="9AA1AB"/>
                 </a:solidFill>
                 <a:latin typeface="Amiri" pitchFamily="2" charset="-78"/>
+                <a:ea typeface="Amiri" pitchFamily="2" charset="-78"/>
                 <a:cs typeface="Amiri" pitchFamily="2" charset="-78"/>
               </a:rPr>
               <a:t>يَقْرَأُ الْكُتُبُ.</a:t>
@@ -26805,6 +26944,7 @@
                   <a:srgbClr val="9AA1AB"/>
                 </a:solidFill>
                 <a:latin typeface="Amiri" pitchFamily="2" charset="-78"/>
+                <a:ea typeface="Amiri" pitchFamily="2" charset="-78"/>
                 <a:cs typeface="Amiri" pitchFamily="2" charset="-78"/>
               </a:rPr>
               <a:t>تُقْرَأُ الْكُتُبَ.</a:t>
@@ -26933,6 +27073,7 @@
                   <a:srgbClr val="1F2A37"/>
                 </a:solidFill>
                 <a:latin typeface="Amiri" pitchFamily="2" charset="-78"/>
+                <a:ea typeface="Amiri" pitchFamily="2" charset="-78"/>
                 <a:cs typeface="Amiri" pitchFamily="2" charset="-78"/>
               </a:rPr>
               <a:t>تُقْرَأُ الْكُتُبُ.</a:t>
@@ -27104,6 +27245,7 @@
                   <a:srgbClr val="D4AF37"/>
                 </a:solidFill>
                 <a:latin typeface="Amiri" pitchFamily="2" charset="-78"/>
+                <a:ea typeface="Amiri" pitchFamily="2" charset="-78"/>
                 <a:cs typeface="Amiri" pitchFamily="2" charset="-78"/>
               </a:rPr>
               <a:t>م</a:t>
@@ -27424,6 +27566,7 @@
                   <a:srgbClr val="8A6D1E"/>
                 </a:solidFill>
                 <a:latin typeface="Amiri" pitchFamily="2" charset="-78"/>
+                <a:ea typeface="Amiri" pitchFamily="2" charset="-78"/>
                 <a:cs typeface="Amiri" pitchFamily="2" charset="-78"/>
               </a:rPr>
               <a:t>اِقْرَأْ وَلَاحِظْ</a:t>
@@ -27537,6 +27680,7 @@
                   <a:srgbClr val="1F2A37"/>
                 </a:solidFill>
                 <a:latin typeface="Amiri" pitchFamily="2" charset="-78"/>
+                <a:ea typeface="Amiri" pitchFamily="2" charset="-78"/>
                 <a:cs typeface="Amiri" pitchFamily="2" charset="-78"/>
               </a:rPr>
               <a:t>إِعْلَانٌ: تُفْتَحُ الْمَكْتَبَةُ يَوْمِيًّا مِنَ الثَّامِنَةِ. يُمْنَعُ الْأَكْلُ فِي الصُّفُوفِ، وَتُجْمَعُ الْهَوَاتِفُ قَبْلَ الِامْتِحَانِ. خَبَرٌ: سُرِقَتْ دَرَّاجَةٌ مِنْ أَمَامِ الْمَدْرَسَةِ أَمْسِ، وَوُجِدَتْ بَعْدَ سَاعَتَيْنِ فِي الْحَدِيقَةِ. وَأُعْلِنَتْ أَسْمَاءُ الْفَائِزِينَ فِي الْمُسَابَقَةِ، وَكَتَبَتِ الْمُدِيرَةُ رِسَالَةَ شُكْرٍ لِكُلِّ الْمُشَارِكِينَ.</a:t>
@@ -27647,6 +27791,7 @@
                   <a:srgbClr val="1B3B6F"/>
                 </a:solidFill>
                 <a:latin typeface="Amiri" pitchFamily="2" charset="-78"/>
+                <a:ea typeface="Amiri" pitchFamily="2" charset="-78"/>
                 <a:cs typeface="Amiri" pitchFamily="2" charset="-78"/>
               </a:rPr>
               <a:t>تُجْمَعُ</a:t>
@@ -27723,6 +27868,7 @@
                   <a:srgbClr val="1B3B6F"/>
                 </a:solidFill>
                 <a:latin typeface="Amiri" pitchFamily="2" charset="-78"/>
+                <a:ea typeface="Amiri" pitchFamily="2" charset="-78"/>
                 <a:cs typeface="Amiri" pitchFamily="2" charset="-78"/>
               </a:rPr>
               <a:t>سُرِقَتْ</a:t>
@@ -27799,6 +27945,7 @@
                   <a:srgbClr val="1B3B6F"/>
                 </a:solidFill>
                 <a:latin typeface="Amiri" pitchFamily="2" charset="-78"/>
+                <a:ea typeface="Amiri" pitchFamily="2" charset="-78"/>
                 <a:cs typeface="Amiri" pitchFamily="2" charset="-78"/>
               </a:rPr>
               <a:t>وُجِدَتْ</a:t>
@@ -27875,6 +28022,7 @@
                   <a:srgbClr val="1B3B6F"/>
                 </a:solidFill>
                 <a:latin typeface="Amiri" pitchFamily="2" charset="-78"/>
+                <a:ea typeface="Amiri" pitchFamily="2" charset="-78"/>
                 <a:cs typeface="Amiri" pitchFamily="2" charset="-78"/>
               </a:rPr>
               <a:t>الْفَائِزِينَ</a:t>
@@ -27951,6 +28099,7 @@
                   <a:srgbClr val="1B3B6F"/>
                 </a:solidFill>
                 <a:latin typeface="Amiri" pitchFamily="2" charset="-78"/>
+                <a:ea typeface="Amiri" pitchFamily="2" charset="-78"/>
                 <a:cs typeface="Amiri" pitchFamily="2" charset="-78"/>
               </a:rPr>
               <a:t>الْمُشَارِكِينَ</a:t>
@@ -28122,6 +28271,7 @@
                   <a:srgbClr val="D4AF37"/>
                 </a:solidFill>
                 <a:latin typeface="Amiri" pitchFamily="2" charset="-78"/>
+                <a:ea typeface="Amiri" pitchFamily="2" charset="-78"/>
                 <a:cs typeface="Amiri" pitchFamily="2" charset="-78"/>
               </a:rPr>
               <a:t>م</a:t>
@@ -28442,6 +28592,7 @@
                   <a:srgbClr val="8A6D1E"/>
                 </a:solidFill>
                 <a:latin typeface="Amiri" pitchFamily="2" charset="-78"/>
+                <a:ea typeface="Amiri" pitchFamily="2" charset="-78"/>
                 <a:cs typeface="Amiri" pitchFamily="2" charset="-78"/>
               </a:rPr>
               <a:t>أَسْئِلَةُ القِرَاءَةِ</a:t>
@@ -29592,6 +29743,7 @@
                   <a:srgbClr val="1F2A37"/>
                 </a:solidFill>
                 <a:latin typeface="Amiri" pitchFamily="2" charset="-78"/>
+                <a:ea typeface="Amiri" pitchFamily="2" charset="-78"/>
                 <a:cs typeface="Amiri" pitchFamily="2" charset="-78"/>
               </a:rPr>
               <a:t>كَتَبَتِ الْمُدِيرَةُ</a:t>
@@ -29693,6 +29845,7 @@
                   <a:srgbClr val="1F2A37"/>
                 </a:solidFill>
                 <a:latin typeface="Amiri" pitchFamily="2" charset="-78"/>
+                <a:ea typeface="Amiri" pitchFamily="2" charset="-78"/>
                 <a:cs typeface="Amiri" pitchFamily="2" charset="-78"/>
               </a:rPr>
               <a:t>أُعْلِنَتْ</a:t>
@@ -29794,6 +29947,7 @@
                   <a:srgbClr val="1F2A37"/>
                 </a:solidFill>
                 <a:latin typeface="Amiri" pitchFamily="2" charset="-78"/>
+                <a:ea typeface="Amiri" pitchFamily="2" charset="-78"/>
                 <a:cs typeface="Amiri" pitchFamily="2" charset="-78"/>
               </a:rPr>
               <a:t>وُجِدَتْ</a:t>
@@ -30507,6 +30661,7 @@
                   <a:srgbClr val="D4AF37"/>
                 </a:solidFill>
                 <a:latin typeface="Amiri" pitchFamily="2" charset="-78"/>
+                <a:ea typeface="Amiri" pitchFamily="2" charset="-78"/>
                 <a:cs typeface="Amiri" pitchFamily="2" charset="-78"/>
               </a:rPr>
               <a:t>م</a:t>
@@ -30827,6 +30982,7 @@
                   <a:srgbClr val="8A6D1E"/>
                 </a:solidFill>
                 <a:latin typeface="Amiri" pitchFamily="2" charset="-78"/>
+                <a:ea typeface="Amiri" pitchFamily="2" charset="-78"/>
                 <a:cs typeface="Amiri" pitchFamily="2" charset="-78"/>
               </a:rPr>
               <a:t>إِجَابَاتُ القِرَاءَةِ</a:t>
@@ -32134,6 +32290,7 @@
                   <a:srgbClr val="1F2A37"/>
                 </a:solidFill>
                 <a:latin typeface="Amiri" pitchFamily="2" charset="-78"/>
+                <a:ea typeface="Amiri" pitchFamily="2" charset="-78"/>
                 <a:cs typeface="Amiri" pitchFamily="2" charset="-78"/>
               </a:rPr>
               <a:t>كَتَبَتِ الْمُدِيرَةُ</a:t>
@@ -32235,6 +32392,7 @@
                   <a:srgbClr val="9AA1AB"/>
                 </a:solidFill>
                 <a:latin typeface="Amiri" pitchFamily="2" charset="-78"/>
+                <a:ea typeface="Amiri" pitchFamily="2" charset="-78"/>
                 <a:cs typeface="Amiri" pitchFamily="2" charset="-78"/>
               </a:rPr>
               <a:t>أُعْلِنَتْ</a:t>
@@ -32336,6 +32494,7 @@
                   <a:srgbClr val="9AA1AB"/>
                 </a:solidFill>
                 <a:latin typeface="Amiri" pitchFamily="2" charset="-78"/>
+                <a:ea typeface="Amiri" pitchFamily="2" charset="-78"/>
                 <a:cs typeface="Amiri" pitchFamily="2" charset="-78"/>
               </a:rPr>
               <a:t>وُجِدَتْ</a:t>
@@ -33152,6 +33311,7 @@
                   <a:srgbClr val="D4AF37"/>
                 </a:solidFill>
                 <a:latin typeface="Amiri" pitchFamily="2" charset="-78"/>
+                <a:ea typeface="Amiri" pitchFamily="2" charset="-78"/>
                 <a:cs typeface="Amiri" pitchFamily="2" charset="-78"/>
               </a:rPr>
               <a:t>م</a:t>
@@ -33472,6 +33632,7 @@
                   <a:srgbClr val="8A6D1E"/>
                 </a:solidFill>
                 <a:latin typeface="Amiri" pitchFamily="2" charset="-78"/>
+                <a:ea typeface="Amiri" pitchFamily="2" charset="-78"/>
                 <a:cs typeface="Amiri" pitchFamily="2" charset="-78"/>
               </a:rPr>
               <a:t>التَّحَدُّثُ</a:t>
@@ -34242,6 +34403,7 @@
                   <a:srgbClr val="1B3B6F"/>
                 </a:solidFill>
                 <a:latin typeface="Amiri" pitchFamily="2" charset="-78"/>
+                <a:ea typeface="Amiri" pitchFamily="2" charset="-78"/>
                 <a:cs typeface="Amiri" pitchFamily="2" charset="-78"/>
               </a:rPr>
               <a:t>مَا الْمَمْنُوعُ فِي مَدْرَسَتِكَ؟</a:t>
@@ -34379,6 +34541,7 @@
                   <a:srgbClr val="1B3B6F"/>
                 </a:solidFill>
                 <a:latin typeface="Amiri" pitchFamily="2" charset="-78"/>
+                <a:ea typeface="Amiri" pitchFamily="2" charset="-78"/>
                 <a:cs typeface="Amiri" pitchFamily="2" charset="-78"/>
               </a:rPr>
               <a:t>كَيْفَ يُنَظَّمُ يَوْمُ الِامْتِحَانِ فِي مَدْرَسَتِكَ؟</a:t>
@@ -34516,6 +34679,7 @@
                   <a:srgbClr val="1B3B6F"/>
                 </a:solidFill>
                 <a:latin typeface="Amiri" pitchFamily="2" charset="-78"/>
+                <a:ea typeface="Amiri" pitchFamily="2" charset="-78"/>
                 <a:cs typeface="Amiri" pitchFamily="2" charset="-78"/>
               </a:rPr>
               <a:t>اِشْرَحْ كَيْفَ يُصْنَعُ الْخُبْزُ. ثُمَّ: مَنْ يَصْنَعُهُ فِي بَيْتِكَ؟</a:t>
@@ -34691,6 +34855,7 @@
                   <a:srgbClr val="1D5FBF"/>
                 </a:solidFill>
                 <a:latin typeface="Amiri" pitchFamily="2" charset="-78"/>
+                <a:ea typeface="Amiri" pitchFamily="2" charset="-78"/>
                 <a:cs typeface="Amiri" pitchFamily="2" charset="-78"/>
               </a:rPr>
               <a:t>يُمْنَعُ ___ ، وَيُمْنَعُ ___ .</a:t>
@@ -34794,6 +34959,7 @@
                   <a:srgbClr val="1F2A37"/>
                 </a:solidFill>
                 <a:latin typeface="Amiri" pitchFamily="2" charset="-78"/>
+                <a:ea typeface="Amiri" pitchFamily="2" charset="-78"/>
                 <a:cs typeface="Amiri" pitchFamily="2" charset="-78"/>
               </a:rPr>
               <a:t>أَوَّلًا تُجْمَعُ ___ ، ثُمَّ تُوَزَّعُ ___ .</a:t>
@@ -34897,6 +35063,7 @@
                   <a:srgbClr val="1F2A37"/>
                 </a:solidFill>
                 <a:latin typeface="Amiri" pitchFamily="2" charset="-78"/>
+                <a:ea typeface="Amiri" pitchFamily="2" charset="-78"/>
                 <a:cs typeface="Amiri" pitchFamily="2" charset="-78"/>
               </a:rPr>
               <a:t>يُخْلَطُ ___ ، ثُمَّ يُخْبَزُ ___ . أُمِّي ___ .</a:t>
@@ -35070,6 +35237,7 @@
                   <a:srgbClr val="1F2A37"/>
                 </a:solidFill>
                 <a:latin typeface="Amiri" pitchFamily="2" charset="-78"/>
+                <a:ea typeface="Amiri" pitchFamily="2" charset="-78"/>
                 <a:cs typeface="Amiri" pitchFamily="2" charset="-78"/>
               </a:rPr>
               <a:t>كَيْفَ تُنَظَّفُ الْمَدْرَسَةُ؟</a:t>
@@ -35209,6 +35377,7 @@
                   <a:srgbClr val="1F2A37"/>
                 </a:solidFill>
                 <a:latin typeface="Amiri" pitchFamily="2" charset="-78"/>
+                <a:ea typeface="Amiri" pitchFamily="2" charset="-78"/>
                 <a:cs typeface="Amiri" pitchFamily="2" charset="-78"/>
               </a:rPr>
               <a:t>تُنَظَّفُ الصُّفُوفُ كُلَّ مَسَاءٍ، وَتُغْسَلُ الْأَرْضُ يَوْمَ الْجُمُعَةِ. وَالطُّلَّابُ يُرَتِّبُونَ طَاوِلَاتِهِمْ قَبْلَ الْخُرُوجِ.</a:t>
@@ -35380,6 +35549,7 @@
                   <a:srgbClr val="D4AF37"/>
                 </a:solidFill>
                 <a:latin typeface="Amiri" pitchFamily="2" charset="-78"/>
+                <a:ea typeface="Amiri" pitchFamily="2" charset="-78"/>
                 <a:cs typeface="Amiri" pitchFamily="2" charset="-78"/>
               </a:rPr>
               <a:t>م</a:t>
@@ -35700,6 +35870,7 @@
                   <a:srgbClr val="8A6D1E"/>
                 </a:solidFill>
                 <a:latin typeface="Amiri" pitchFamily="2" charset="-78"/>
+                <a:ea typeface="Amiri" pitchFamily="2" charset="-78"/>
                 <a:cs typeface="Amiri" pitchFamily="2" charset="-78"/>
               </a:rPr>
               <a:t>اُكْتُبْ</a:t>
@@ -35875,6 +36046,7 @@
                   <a:srgbClr val="2E8B57"/>
                 </a:solidFill>
                 <a:latin typeface="Amiri" pitchFamily="2" charset="-78"/>
+                <a:ea typeface="Amiri" pitchFamily="2" charset="-78"/>
                 <a:cs typeface="Amiri" pitchFamily="2" charset="-78"/>
               </a:rPr>
               <a:t>الأَسَاسُ</a:t>
@@ -36169,6 +36341,7 @@
                   <a:srgbClr val="C9780A"/>
                 </a:solidFill>
                 <a:latin typeface="Amiri" pitchFamily="2" charset="-78"/>
+                <a:ea typeface="Amiri" pitchFamily="2" charset="-78"/>
                 <a:cs typeface="Amiri" pitchFamily="2" charset="-78"/>
               </a:rPr>
               <a:t>التَّطْوِيرُ</a:t>
@@ -36463,6 +36636,7 @@
                   <a:srgbClr val="B83227"/>
                 </a:solidFill>
                 <a:latin typeface="Amiri" pitchFamily="2" charset="-78"/>
+                <a:ea typeface="Amiri" pitchFamily="2" charset="-78"/>
                 <a:cs typeface="Amiri" pitchFamily="2" charset="-78"/>
               </a:rPr>
               <a:t>التَّحَدِّي</a:t>
@@ -36753,6 +36927,7 @@
                   <a:srgbClr val="D4AF37"/>
                 </a:solidFill>
                 <a:latin typeface="Amiri" pitchFamily="2" charset="-78"/>
+                <a:ea typeface="Amiri" pitchFamily="2" charset="-78"/>
                 <a:cs typeface="Amiri" pitchFamily="2" charset="-78"/>
               </a:rPr>
               <a:t>م</a:t>
@@ -37073,6 +37248,7 @@
                   <a:srgbClr val="8A6D1E"/>
                 </a:solidFill>
                 <a:latin typeface="Amiri" pitchFamily="2" charset="-78"/>
+                <a:ea typeface="Amiri" pitchFamily="2" charset="-78"/>
                 <a:cs typeface="Amiri" pitchFamily="2" charset="-78"/>
               </a:rPr>
               <a:t>قَوَالِبُ الجُمَلِ</a:t>
@@ -37248,6 +37424,7 @@
                   <a:srgbClr val="1B3B6F"/>
                 </a:solidFill>
                 <a:latin typeface="Amiri" pitchFamily="2" charset="-78"/>
+                <a:ea typeface="Amiri" pitchFamily="2" charset="-78"/>
                 <a:cs typeface="Amiri" pitchFamily="2" charset="-78"/>
               </a:rPr>
               <a:t>أُعْلِنَتِ النَّتَائِجُ ______ .</a:t>
@@ -37324,6 +37501,7 @@
                   <a:srgbClr val="1B3B6F"/>
                 </a:solidFill>
                 <a:latin typeface="Amiri" pitchFamily="2" charset="-78"/>
+                <a:ea typeface="Amiri" pitchFamily="2" charset="-78"/>
                 <a:cs typeface="Amiri" pitchFamily="2" charset="-78"/>
               </a:rPr>
               <a:t>تُجْمَعُ الْكُتُبُ ______ .</a:t>
@@ -37400,6 +37578,7 @@
                   <a:srgbClr val="1B3B6F"/>
                 </a:solidFill>
                 <a:latin typeface="Amiri" pitchFamily="2" charset="-78"/>
+                <a:ea typeface="Amiri" pitchFamily="2" charset="-78"/>
                 <a:cs typeface="Amiri" pitchFamily="2" charset="-78"/>
               </a:rPr>
               <a:t>وُجِدَتِ الْحَقِيبَةُ ______ .</a:t>
@@ -37476,6 +37655,7 @@
                   <a:srgbClr val="1B3B6F"/>
                 </a:solidFill>
                 <a:latin typeface="Amiri" pitchFamily="2" charset="-78"/>
+                <a:ea typeface="Amiri" pitchFamily="2" charset="-78"/>
                 <a:cs typeface="Amiri" pitchFamily="2" charset="-78"/>
               </a:rPr>
               <a:t>يُقَالُ إِنَّ ______ .</a:t>
@@ -37651,6 +37831,7 @@
                   <a:srgbClr val="1B3B6F"/>
                 </a:solidFill>
                 <a:latin typeface="Amiri" pitchFamily="2" charset="-78"/>
+                <a:ea typeface="Amiri" pitchFamily="2" charset="-78"/>
                 <a:cs typeface="Amiri" pitchFamily="2" charset="-78"/>
               </a:rPr>
               <a:t>يُمْنَعُ ______ .</a:t>
@@ -37727,6 +37908,7 @@
                   <a:srgbClr val="1B3B6F"/>
                 </a:solidFill>
                 <a:latin typeface="Amiri" pitchFamily="2" charset="-78"/>
+                <a:ea typeface="Amiri" pitchFamily="2" charset="-78"/>
                 <a:cs typeface="Amiri" pitchFamily="2" charset="-78"/>
               </a:rPr>
               <a:t>تُفْتَحُ الْمَكْتَبَةُ فِي ______ .</a:t>
@@ -37803,6 +37985,7 @@
                   <a:srgbClr val="1B3B6F"/>
                 </a:solidFill>
                 <a:latin typeface="Amiri" pitchFamily="2" charset="-78"/>
+                <a:ea typeface="Amiri" pitchFamily="2" charset="-78"/>
                 <a:cs typeface="Amiri" pitchFamily="2" charset="-78"/>
               </a:rPr>
               <a:t>يُغْلَقُ الْبَابُ فِي ______ .</a:t>
@@ -37879,6 +38062,7 @@
                   <a:srgbClr val="1B3B6F"/>
                 </a:solidFill>
                 <a:latin typeface="Amiri" pitchFamily="2" charset="-78"/>
+                <a:ea typeface="Amiri" pitchFamily="2" charset="-78"/>
                 <a:cs typeface="Amiri" pitchFamily="2" charset="-78"/>
               </a:rPr>
               <a:t>سُرِقَ ______ .</a:t>
@@ -38027,6 +38211,7 @@
                   <a:srgbClr val="1B3B6F"/>
                 </a:solidFill>
                 <a:latin typeface="Amiri" pitchFamily="2" charset="-78"/>
+                <a:ea typeface="Amiri" pitchFamily="2" charset="-78"/>
                 <a:cs typeface="Amiri" pitchFamily="2" charset="-78"/>
               </a:rPr>
               <a:t>يُمْنَعُ  ·  يُفْتَحُ  ·  تُفْتَحُ  ·  يُغْلَقُ  ·  تُجْمَعُ  ·  سُرِقَ  ·  وُجِدَ  ·  كُتِبَ  ·  أُعْلِنَتْ  ·  نُشِرَتْ  ·  تُسْتَعْمَلُ  ·  يُقَالُ</a:t>
@@ -38160,6 +38345,7 @@
                   <a:srgbClr val="D4AF37"/>
                 </a:solidFill>
                 <a:latin typeface="Amiri" pitchFamily="2" charset="-78"/>
+                <a:ea typeface="Amiri" pitchFamily="2" charset="-78"/>
                 <a:cs typeface="Amiri" pitchFamily="2" charset="-78"/>
               </a:rPr>
               <a:t>م</a:t>
@@ -38480,6 +38666,7 @@
                   <a:srgbClr val="8A6D1E"/>
                 </a:solidFill>
                 <a:latin typeface="Amiri" pitchFamily="2" charset="-78"/>
+                <a:ea typeface="Amiri" pitchFamily="2" charset="-78"/>
                 <a:cs typeface="Amiri" pitchFamily="2" charset="-78"/>
               </a:rPr>
               <a:t>مُهِمَّةُ التَّحَدِّي</a:t>
@@ -38955,6 +39142,7 @@
                   <a:srgbClr val="1B3B6F"/>
                 </a:solidFill>
                 <a:latin typeface="Amiri" pitchFamily="2" charset="-78"/>
+                <a:ea typeface="Amiri" pitchFamily="2" charset="-78"/>
                 <a:cs typeface="Amiri" pitchFamily="2" charset="-78"/>
               </a:rPr>
               <a:t>أُعْلِنَ أَنَّ</a:t>
@@ -39031,6 +39219,7 @@
                   <a:srgbClr val="1B3B6F"/>
                 </a:solidFill>
                 <a:latin typeface="Amiri" pitchFamily="2" charset="-78"/>
+                <a:ea typeface="Amiri" pitchFamily="2" charset="-78"/>
                 <a:cs typeface="Amiri" pitchFamily="2" charset="-78"/>
               </a:rPr>
               <a:t>يُعْتَقَدُ أَنَّ</a:t>
@@ -39107,6 +39296,7 @@
                   <a:srgbClr val="1B3B6F"/>
                 </a:solidFill>
                 <a:latin typeface="Amiri" pitchFamily="2" charset="-78"/>
+                <a:ea typeface="Amiri" pitchFamily="2" charset="-78"/>
                 <a:cs typeface="Amiri" pitchFamily="2" charset="-78"/>
               </a:rPr>
               <a:t>يُرْجَى</a:t>
@@ -39183,6 +39373,7 @@
                   <a:srgbClr val="1B3B6F"/>
                 </a:solidFill>
                 <a:latin typeface="Amiri" pitchFamily="2" charset="-78"/>
+                <a:ea typeface="Amiri" pitchFamily="2" charset="-78"/>
                 <a:cs typeface="Amiri" pitchFamily="2" charset="-78"/>
               </a:rPr>
               <a:t>تُسْتَعْمَلُ</a:t>
@@ -39259,6 +39450,7 @@
                   <a:srgbClr val="1B3B6F"/>
                 </a:solidFill>
                 <a:latin typeface="Amiri" pitchFamily="2" charset="-78"/>
+                <a:ea typeface="Amiri" pitchFamily="2" charset="-78"/>
                 <a:cs typeface="Amiri" pitchFamily="2" charset="-78"/>
               </a:rPr>
               <a:t>أَوَّلًا … ثُمَّ</a:t>
@@ -39335,6 +39527,7 @@
                   <a:srgbClr val="1B3B6F"/>
                 </a:solidFill>
                 <a:latin typeface="Amiri" pitchFamily="2" charset="-78"/>
+                <a:ea typeface="Amiri" pitchFamily="2" charset="-78"/>
                 <a:cs typeface="Amiri" pitchFamily="2" charset="-78"/>
               </a:rPr>
               <a:t>بَعْدَ ذَلِكَ</a:t>
@@ -39506,6 +39699,7 @@
                   <a:srgbClr val="D4AF37"/>
                 </a:solidFill>
                 <a:latin typeface="Amiri" pitchFamily="2" charset="-78"/>
+                <a:ea typeface="Amiri" pitchFamily="2" charset="-78"/>
                 <a:cs typeface="Amiri" pitchFamily="2" charset="-78"/>
               </a:rPr>
               <a:t>م</a:t>
@@ -39826,6 +40020,7 @@
                   <a:srgbClr val="8A6D1E"/>
                 </a:solidFill>
                 <a:latin typeface="Amiri" pitchFamily="2" charset="-78"/>
+                <a:ea typeface="Amiri" pitchFamily="2" charset="-78"/>
                 <a:cs typeface="Amiri" pitchFamily="2" charset="-78"/>
               </a:rPr>
               <a:t>نَمُوذَجُ الإِجَابَةِ</a:t>
@@ -39939,6 +40134,7 @@
                   <a:srgbClr val="1F2A37"/>
                 </a:solidFill>
                 <a:latin typeface="Amiri" pitchFamily="2" charset="-78"/>
+                <a:ea typeface="Amiri" pitchFamily="2" charset="-78"/>
                 <a:cs typeface="Amiri" pitchFamily="2" charset="-78"/>
               </a:rPr>
               <a:t>خَبَرٌ مِنْ مَدْرَسَتِنَا: أُقِيمَ مَعْرِضُ الْعُلُومِ يَوْمَ الْخَمِيسِ، وَدُعِيَ إِلَيْهِ الْأَهَالِي. عُرِضَتْ أَكْثَرُ مِنْ ثَلَاثِينَ تَجْرِبَةً، وَكُتِبَتْ تَقَارِيرُ عَنْ كُلِّ مَشْرُوعٍ. فِي الْمَعْرِضِ تُسْتَعْمَلُ أَدَوَاتٌ آمِنَةٌ فَقَطْ، وَيُمْنَعُ لَمْسُ الْمَوَادِّ الْكِيمِيَائِيَّةِ. تُجْمَعُ آرَاءُ الزُّوَّارِ فِي اسْتِمَارَةٍ قَصِيرَةٍ. وَفِي النِّهَايَةِ اخْتَارَتْ لَجْنَةُ الْمُعَلِّمِينَ أَفْضَلَ مَشْرُوعٍ، وَفَازَتْ بِهِ طَالِبَتَانِ مِنَ الصَّفِّ الْعَاشِرِ.</a:t>
@@ -40435,6 +40631,7 @@
                   <a:srgbClr val="D4AF37"/>
                 </a:solidFill>
                 <a:latin typeface="Amiri" pitchFamily="2" charset="-78"/>
+                <a:ea typeface="Amiri" pitchFamily="2" charset="-78"/>
                 <a:cs typeface="Amiri" pitchFamily="2" charset="-78"/>
               </a:rPr>
               <a:t>م</a:t>
@@ -40755,6 +40952,7 @@
                   <a:srgbClr val="8A6D1E"/>
                 </a:solidFill>
                 <a:latin typeface="Amiri" pitchFamily="2" charset="-78"/>
+                <a:ea typeface="Amiri" pitchFamily="2" charset="-78"/>
                 <a:cs typeface="Amiri" pitchFamily="2" charset="-78"/>
               </a:rPr>
               <a:t>خَرِيطَةُ الدَّرْسِ</a:t>
@@ -41069,6 +41267,7 @@
                   <a:srgbClr val="0E7C86"/>
                 </a:solidFill>
                 <a:latin typeface="Amiri" pitchFamily="2" charset="-78"/>
+                <a:ea typeface="Amiri" pitchFamily="2" charset="-78"/>
                 <a:cs typeface="Amiri" pitchFamily="2" charset="-78"/>
               </a:rPr>
               <a:t>اِبْدَأِ الآنَ</a:t>
@@ -41345,6 +41544,7 @@
                   <a:srgbClr val="1B3B6F"/>
                 </a:solidFill>
                 <a:latin typeface="Amiri" pitchFamily="2" charset="-78"/>
+                <a:ea typeface="Amiri" pitchFamily="2" charset="-78"/>
                 <a:cs typeface="Amiri" pitchFamily="2" charset="-78"/>
               </a:rPr>
               <a:t>كَلِمَاتٌ وَقَوَاعِدُ</a:t>
@@ -41621,6 +41821,7 @@
                   <a:srgbClr val="6B4C9A"/>
                 </a:solidFill>
                 <a:latin typeface="Amiri" pitchFamily="2" charset="-78"/>
+                <a:ea typeface="Amiri" pitchFamily="2" charset="-78"/>
                 <a:cs typeface="Amiri" pitchFamily="2" charset="-78"/>
               </a:rPr>
               <a:t>شَاهِدْ</a:t>
@@ -41897,6 +42098,7 @@
                   <a:srgbClr val="2F6FB0"/>
                 </a:solidFill>
                 <a:latin typeface="Amiri" pitchFamily="2" charset="-78"/>
+                <a:ea typeface="Amiri" pitchFamily="2" charset="-78"/>
                 <a:cs typeface="Amiri" pitchFamily="2" charset="-78"/>
               </a:rPr>
               <a:t>مَعًا</a:t>
@@ -42173,6 +42375,7 @@
                   <a:srgbClr val="1E6B52"/>
                 </a:solidFill>
                 <a:latin typeface="Amiri" pitchFamily="2" charset="-78"/>
+                <a:ea typeface="Amiri" pitchFamily="2" charset="-78"/>
                 <a:cs typeface="Amiri" pitchFamily="2" charset="-78"/>
               </a:rPr>
               <a:t>وَحْدَكَ</a:t>
@@ -42449,6 +42652,7 @@
                   <a:srgbClr val="8A6D1E"/>
                 </a:solidFill>
                 <a:latin typeface="Amiri" pitchFamily="2" charset="-78"/>
+                <a:ea typeface="Amiri" pitchFamily="2" charset="-78"/>
                 <a:cs typeface="Amiri" pitchFamily="2" charset="-78"/>
               </a:rPr>
               <a:t>قَيِّمْ عَمَلَكَ</a:t>
@@ -42725,6 +42929,7 @@
                   <a:srgbClr val="C45A3C"/>
                 </a:solidFill>
                 <a:latin typeface="Amiri" pitchFamily="2" charset="-78"/>
+                <a:ea typeface="Amiri" pitchFamily="2" charset="-78"/>
                 <a:cs typeface="Amiri" pitchFamily="2" charset="-78"/>
               </a:rPr>
               <a:t>اِسْتَعِدَّ</a:t>
@@ -42968,6 +43173,7 @@
                   <a:srgbClr val="D4AF37"/>
                 </a:solidFill>
                 <a:latin typeface="Amiri" pitchFamily="2" charset="-78"/>
+                <a:ea typeface="Amiri" pitchFamily="2" charset="-78"/>
                 <a:cs typeface="Amiri" pitchFamily="2" charset="-78"/>
               </a:rPr>
               <a:t>م</a:t>
@@ -43288,6 +43494,7 @@
                   <a:srgbClr val="8A6D1E"/>
                 </a:solidFill>
                 <a:latin typeface="Amiri" pitchFamily="2" charset="-78"/>
+                <a:ea typeface="Amiri" pitchFamily="2" charset="-78"/>
                 <a:cs typeface="Amiri" pitchFamily="2" charset="-78"/>
               </a:rPr>
               <a:t>قَيِّمْ عَمَلَكَ</a:t>
@@ -44445,6 +44652,7 @@
                   <a:srgbClr val="D4AF37"/>
                 </a:solidFill>
                 <a:latin typeface="Amiri" pitchFamily="2" charset="-78"/>
+                <a:ea typeface="Amiri" pitchFamily="2" charset="-78"/>
                 <a:cs typeface="Amiri" pitchFamily="2" charset="-78"/>
               </a:rPr>
               <a:t>م</a:t>
@@ -44765,6 +44973,7 @@
                   <a:srgbClr val="8A6D1E"/>
                 </a:solidFill>
                 <a:latin typeface="Amiri" pitchFamily="2" charset="-78"/>
+                <a:ea typeface="Amiri" pitchFamily="2" charset="-78"/>
                 <a:cs typeface="Amiri" pitchFamily="2" charset="-78"/>
               </a:rPr>
               <a:t>تَذْكِرَةُ الخُرُوجِ</a:t>
@@ -45039,6 +45248,7 @@
                   <a:srgbClr val="1F2A37"/>
                 </a:solidFill>
                 <a:latin typeface="Amiri" pitchFamily="2" charset="-78"/>
+                <a:ea typeface="Amiri" pitchFamily="2" charset="-78"/>
                 <a:cs typeface="Amiri" pitchFamily="2" charset="-78"/>
               </a:rPr>
               <a:t>فُتِحَ الْبَابُ</a:t>
@@ -45140,6 +45350,7 @@
                   <a:srgbClr val="1F2A37"/>
                 </a:solidFill>
                 <a:latin typeface="Amiri" pitchFamily="2" charset="-78"/>
+                <a:ea typeface="Amiri" pitchFamily="2" charset="-78"/>
                 <a:cs typeface="Amiri" pitchFamily="2" charset="-78"/>
               </a:rPr>
               <a:t>فَتَحَ الْبَابُ</a:t>
@@ -45241,6 +45452,7 @@
                   <a:srgbClr val="1F2A37"/>
                 </a:solidFill>
                 <a:latin typeface="Amiri" pitchFamily="2" charset="-78"/>
+                <a:ea typeface="Amiri" pitchFamily="2" charset="-78"/>
                 <a:cs typeface="Amiri" pitchFamily="2" charset="-78"/>
               </a:rPr>
               <a:t>فُتِحَ الْبَابَ</a:t>
@@ -45477,6 +45689,7 @@
                   <a:srgbClr val="1F2A37"/>
                 </a:solidFill>
                 <a:latin typeface="Amiri" pitchFamily="2" charset="-78"/>
+                <a:ea typeface="Amiri" pitchFamily="2" charset="-78"/>
                 <a:cs typeface="Amiri" pitchFamily="2" charset="-78"/>
               </a:rPr>
               <a:t>يَقْرَأُ الْكُتُبَ</a:t>
@@ -45578,6 +45791,7 @@
                   <a:srgbClr val="1F2A37"/>
                 </a:solidFill>
                 <a:latin typeface="Amiri" pitchFamily="2" charset="-78"/>
+                <a:ea typeface="Amiri" pitchFamily="2" charset="-78"/>
                 <a:cs typeface="Amiri" pitchFamily="2" charset="-78"/>
               </a:rPr>
               <a:t>تُقْرَأُ الْكُتُبُ</a:t>
@@ -45679,6 +45893,7 @@
                   <a:srgbClr val="1F2A37"/>
                 </a:solidFill>
                 <a:latin typeface="Amiri" pitchFamily="2" charset="-78"/>
+                <a:ea typeface="Amiri" pitchFamily="2" charset="-78"/>
                 <a:cs typeface="Amiri" pitchFamily="2" charset="-78"/>
               </a:rPr>
               <a:t>تُقْرَأُ الْكُتُبَ</a:t>
@@ -45915,6 +46130,7 @@
                   <a:srgbClr val="1F2A37"/>
                 </a:solidFill>
                 <a:latin typeface="Amiri" pitchFamily="2" charset="-78"/>
+                <a:ea typeface="Amiri" pitchFamily="2" charset="-78"/>
                 <a:cs typeface="Amiri" pitchFamily="2" charset="-78"/>
               </a:rPr>
               <a:t>كُسِرَتِ النَّافِذَةُ.</a:t>
@@ -46016,6 +46232,7 @@
                   <a:srgbClr val="1F2A37"/>
                 </a:solidFill>
                 <a:latin typeface="Amiri" pitchFamily="2" charset="-78"/>
+                <a:ea typeface="Amiri" pitchFamily="2" charset="-78"/>
                 <a:cs typeface="Amiri" pitchFamily="2" charset="-78"/>
               </a:rPr>
               <a:t>كَسَرَتِ النَّافِذَةُ.</a:t>
@@ -46117,6 +46334,7 @@
                   <a:srgbClr val="1F2A37"/>
                 </a:solidFill>
                 <a:latin typeface="Amiri" pitchFamily="2" charset="-78"/>
+                <a:ea typeface="Amiri" pitchFamily="2" charset="-78"/>
                 <a:cs typeface="Amiri" pitchFamily="2" charset="-78"/>
               </a:rPr>
               <a:t>كُسِرَ النَّافِذَةَ.</a:t>
@@ -46360,6 +46578,7 @@
                   <a:srgbClr val="D4AF37"/>
                 </a:solidFill>
                 <a:latin typeface="Amiri" pitchFamily="2" charset="-78"/>
+                <a:ea typeface="Amiri" pitchFamily="2" charset="-78"/>
                 <a:cs typeface="Amiri" pitchFamily="2" charset="-78"/>
               </a:rPr>
               <a:t>م</a:t>
@@ -46680,6 +46899,7 @@
                   <a:srgbClr val="8A6D1E"/>
                 </a:solidFill>
                 <a:latin typeface="Amiri" pitchFamily="2" charset="-78"/>
+                <a:ea typeface="Amiri" pitchFamily="2" charset="-78"/>
                 <a:cs typeface="Amiri" pitchFamily="2" charset="-78"/>
               </a:rPr>
               <a:t>إِجَابَاتُ تَذْكِرَةِ الخُرُوجِ</a:t>
@@ -46981,6 +47201,7 @@
                   <a:srgbClr val="1F2A37"/>
                 </a:solidFill>
                 <a:latin typeface="Amiri" pitchFamily="2" charset="-78"/>
+                <a:ea typeface="Amiri" pitchFamily="2" charset="-78"/>
                 <a:cs typeface="Amiri" pitchFamily="2" charset="-78"/>
               </a:rPr>
               <a:t>فُتِحَ الْبَابُ</a:t>
@@ -47082,6 +47303,7 @@
                   <a:srgbClr val="9AA1AB"/>
                 </a:solidFill>
                 <a:latin typeface="Amiri" pitchFamily="2" charset="-78"/>
+                <a:ea typeface="Amiri" pitchFamily="2" charset="-78"/>
                 <a:cs typeface="Amiri" pitchFamily="2" charset="-78"/>
               </a:rPr>
               <a:t>فَتَحَ الْبَابُ</a:t>
@@ -47183,6 +47405,7 @@
                   <a:srgbClr val="9AA1AB"/>
                 </a:solidFill>
                 <a:latin typeface="Amiri" pitchFamily="2" charset="-78"/>
+                <a:ea typeface="Amiri" pitchFamily="2" charset="-78"/>
                 <a:cs typeface="Amiri" pitchFamily="2" charset="-78"/>
               </a:rPr>
               <a:t>فُتِحَ الْبَابَ</a:t>
@@ -47457,6 +47680,7 @@
                   <a:srgbClr val="9AA1AB"/>
                 </a:solidFill>
                 <a:latin typeface="Amiri" pitchFamily="2" charset="-78"/>
+                <a:ea typeface="Amiri" pitchFamily="2" charset="-78"/>
                 <a:cs typeface="Amiri" pitchFamily="2" charset="-78"/>
               </a:rPr>
               <a:t>يَقْرَأُ الْكُتُبَ</a:t>
@@ -47585,6 +47809,7 @@
                   <a:srgbClr val="1F2A37"/>
                 </a:solidFill>
                 <a:latin typeface="Amiri" pitchFamily="2" charset="-78"/>
+                <a:ea typeface="Amiri" pitchFamily="2" charset="-78"/>
                 <a:cs typeface="Amiri" pitchFamily="2" charset="-78"/>
               </a:rPr>
               <a:t>تُقْرَأُ الْكُتُبُ</a:t>
@@ -47686,6 +47911,7 @@
                   <a:srgbClr val="9AA1AB"/>
                 </a:solidFill>
                 <a:latin typeface="Amiri" pitchFamily="2" charset="-78"/>
+                <a:ea typeface="Amiri" pitchFamily="2" charset="-78"/>
                 <a:cs typeface="Amiri" pitchFamily="2" charset="-78"/>
               </a:rPr>
               <a:t>تُقْرَأُ الْكُتُبَ</a:t>
@@ -47987,6 +48213,7 @@
                   <a:srgbClr val="1F2A37"/>
                 </a:solidFill>
                 <a:latin typeface="Amiri" pitchFamily="2" charset="-78"/>
+                <a:ea typeface="Amiri" pitchFamily="2" charset="-78"/>
                 <a:cs typeface="Amiri" pitchFamily="2" charset="-78"/>
               </a:rPr>
               <a:t>كُسِرَتِ النَّافِذَةُ.</a:t>
@@ -48088,6 +48315,7 @@
                   <a:srgbClr val="9AA1AB"/>
                 </a:solidFill>
                 <a:latin typeface="Amiri" pitchFamily="2" charset="-78"/>
+                <a:ea typeface="Amiri" pitchFamily="2" charset="-78"/>
                 <a:cs typeface="Amiri" pitchFamily="2" charset="-78"/>
               </a:rPr>
               <a:t>كَسَرَتِ النَّافِذَةُ.</a:t>
@@ -48189,6 +48417,7 @@
                   <a:srgbClr val="9AA1AB"/>
                 </a:solidFill>
                 <a:latin typeface="Amiri" pitchFamily="2" charset="-78"/>
+                <a:ea typeface="Amiri" pitchFamily="2" charset="-78"/>
                 <a:cs typeface="Amiri" pitchFamily="2" charset="-78"/>
               </a:rPr>
               <a:t>كُسِرَ النَّافِذَةَ.</a:t>
@@ -48470,6 +48699,7 @@
                   <a:srgbClr val="D4AF37"/>
                 </a:solidFill>
                 <a:latin typeface="Amiri" pitchFamily="2" charset="-78"/>
+                <a:ea typeface="Amiri" pitchFamily="2" charset="-78"/>
                 <a:cs typeface="Amiri" pitchFamily="2" charset="-78"/>
               </a:rPr>
               <a:t>م</a:t>
@@ -48790,6 +49020,7 @@
                   <a:srgbClr val="8A6D1E"/>
                 </a:solidFill>
                 <a:latin typeface="Amiri" pitchFamily="2" charset="-78"/>
+                <a:ea typeface="Amiri" pitchFamily="2" charset="-78"/>
                 <a:cs typeface="Amiri" pitchFamily="2" charset="-78"/>
               </a:rPr>
               <a:t>التَّحْضِيرُ لِلدَّرْسِ القَادِمِ</a:t>
@@ -49003,6 +49234,7 @@
                   <a:srgbClr val="1B3B6F"/>
                 </a:solidFill>
                 <a:latin typeface="Amiri" pitchFamily="2" charset="-78"/>
+                <a:ea typeface="Amiri" pitchFamily="2" charset="-78"/>
                 <a:cs typeface="Amiri" pitchFamily="2" charset="-78"/>
               </a:rPr>
               <a:t>الْكِتَابَةُ</a:t>
@@ -49092,6 +49324,7 @@
                   <a:srgbClr val="1B3B6F"/>
                 </a:solidFill>
                 <a:latin typeface="Amiri" pitchFamily="2" charset="-78"/>
+                <a:ea typeface="Amiri" pitchFamily="2" charset="-78"/>
                 <a:cs typeface="Amiri" pitchFamily="2" charset="-78"/>
               </a:rPr>
               <a:t>كَاتِبٌ</a:t>
@@ -49181,6 +49414,7 @@
                   <a:srgbClr val="1B3B6F"/>
                 </a:solidFill>
                 <a:latin typeface="Amiri" pitchFamily="2" charset="-78"/>
+                <a:ea typeface="Amiri" pitchFamily="2" charset="-78"/>
                 <a:cs typeface="Amiri" pitchFamily="2" charset="-78"/>
               </a:rPr>
               <a:t>مَكْتُوبٌ</a:t>
@@ -49270,6 +49504,7 @@
                   <a:srgbClr val="1B3B6F"/>
                 </a:solidFill>
                 <a:latin typeface="Amiri" pitchFamily="2" charset="-78"/>
+                <a:ea typeface="Amiri" pitchFamily="2" charset="-78"/>
                 <a:cs typeface="Amiri" pitchFamily="2" charset="-78"/>
               </a:rPr>
               <a:t>الدِّرَاسَةُ</a:t>
@@ -49359,6 +49594,7 @@
                   <a:srgbClr val="1B3B6F"/>
                 </a:solidFill>
                 <a:latin typeface="Amiri" pitchFamily="2" charset="-78"/>
+                <a:ea typeface="Amiri" pitchFamily="2" charset="-78"/>
                 <a:cs typeface="Amiri" pitchFamily="2" charset="-78"/>
               </a:rPr>
               <a:t>مَدْرُوسٌ</a:t>
@@ -49524,6 +49760,7 @@
                   <a:srgbClr val="1B3B6F"/>
                 </a:solidFill>
                 <a:latin typeface="Amiri" pitchFamily="2" charset="-78"/>
+                <a:ea typeface="Amiri" pitchFamily="2" charset="-78"/>
                 <a:cs typeface="Amiri" pitchFamily="2" charset="-78"/>
               </a:rPr>
               <a:t>كَتَبَ · كِتَابَةٌ · كَاتِبٌ · ______</a:t>
@@ -50193,6 +50430,7 @@
                   <a:srgbClr val="FFFFFF"/>
                 </a:solidFill>
                 <a:latin typeface="Amiri" pitchFamily="2" charset="-78"/>
+                <a:ea typeface="Amiri" pitchFamily="2" charset="-78"/>
                 <a:cs typeface="Amiri" pitchFamily="2" charset="-78"/>
               </a:rPr>
               <a:t>أَحْسَنْتُمْ! إِلَى اللِّقَاءِ</a:t>
@@ -50345,6 +50583,7 @@
                   <a:srgbClr val="D4AF37"/>
                 </a:solidFill>
                 <a:latin typeface="Amiri" pitchFamily="2" charset="-78"/>
+                <a:ea typeface="Amiri" pitchFamily="2" charset="-78"/>
                 <a:cs typeface="Amiri" pitchFamily="2" charset="-78"/>
               </a:rPr>
               <a:t>الْمَصْدَرُ وَاسْمُ الْفَاعِلِ وَاسْمُ الْمَفْعُولِ</a:t>
@@ -50478,6 +50717,7 @@
                   <a:srgbClr val="D4AF37"/>
                 </a:solidFill>
                 <a:latin typeface="Amiri" pitchFamily="2" charset="-78"/>
+                <a:ea typeface="Amiri" pitchFamily="2" charset="-78"/>
                 <a:cs typeface="Amiri" pitchFamily="2" charset="-78"/>
               </a:rPr>
               <a:t>م</a:t>
@@ -50798,6 +51038,7 @@
                   <a:srgbClr val="8A6D1E"/>
                 </a:solidFill>
                 <a:latin typeface="Amiri" pitchFamily="2" charset="-78"/>
+                <a:ea typeface="Amiri" pitchFamily="2" charset="-78"/>
                 <a:cs typeface="Amiri" pitchFamily="2" charset="-78"/>
               </a:rPr>
               <a:t>اِبْدَأِ الآنَ</a:t>
@@ -51072,6 +51313,7 @@
                   <a:srgbClr val="1F2A37"/>
                 </a:solidFill>
                 <a:latin typeface="Amiri" pitchFamily="2" charset="-78"/>
+                <a:ea typeface="Amiri" pitchFamily="2" charset="-78"/>
                 <a:cs typeface="Amiri" pitchFamily="2" charset="-78"/>
               </a:rPr>
               <a:t>كَتَبَتِ الرِّسَالَةُ</a:t>
@@ -51173,6 +51415,7 @@
                   <a:srgbClr val="1F2A37"/>
                 </a:solidFill>
                 <a:latin typeface="Amiri" pitchFamily="2" charset="-78"/>
+                <a:ea typeface="Amiri" pitchFamily="2" charset="-78"/>
                 <a:cs typeface="Amiri" pitchFamily="2" charset="-78"/>
               </a:rPr>
               <a:t>كُتِبَتِ الرِّسَالَةُ</a:t>
@@ -51274,6 +51517,7 @@
                   <a:srgbClr val="1F2A37"/>
                 </a:solidFill>
                 <a:latin typeface="Amiri" pitchFamily="2" charset="-78"/>
+                <a:ea typeface="Amiri" pitchFamily="2" charset="-78"/>
                 <a:cs typeface="Amiri" pitchFamily="2" charset="-78"/>
               </a:rPr>
               <a:t>تَكْتُبُ الرِّسَالَةُ</a:t>
@@ -51510,6 +51754,7 @@
                   <a:srgbClr val="1F2A37"/>
                 </a:solidFill>
                 <a:latin typeface="Amiri" pitchFamily="2" charset="-78"/>
+                <a:ea typeface="Amiri" pitchFamily="2" charset="-78"/>
                 <a:cs typeface="Amiri" pitchFamily="2" charset="-78"/>
               </a:rPr>
               <a:t>تُكْتَبُ الرِّسَالَةُ</a:t>
@@ -51611,6 +51856,7 @@
                   <a:srgbClr val="1F2A37"/>
                 </a:solidFill>
                 <a:latin typeface="Amiri" pitchFamily="2" charset="-78"/>
+                <a:ea typeface="Amiri" pitchFamily="2" charset="-78"/>
                 <a:cs typeface="Amiri" pitchFamily="2" charset="-78"/>
               </a:rPr>
               <a:t>تَكْتُبُ الرِّسَالَةُ</a:t>
@@ -51712,6 +51958,7 @@
                   <a:srgbClr val="1F2A37"/>
                 </a:solidFill>
                 <a:latin typeface="Amiri" pitchFamily="2" charset="-78"/>
+                <a:ea typeface="Amiri" pitchFamily="2" charset="-78"/>
                 <a:cs typeface="Amiri" pitchFamily="2" charset="-78"/>
               </a:rPr>
               <a:t>كَتَبَ الرِّسَالَةَ</a:t>
@@ -51948,6 +52195,7 @@
                   <a:srgbClr val="1F2A37"/>
                 </a:solidFill>
                 <a:latin typeface="Amiri" pitchFamily="2" charset="-78"/>
+                <a:ea typeface="Amiri" pitchFamily="2" charset="-78"/>
                 <a:cs typeface="Amiri" pitchFamily="2" charset="-78"/>
               </a:rPr>
               <a:t>يَمْنَعُ التَّدْخِينُ</a:t>
@@ -52049,6 +52297,7 @@
                   <a:srgbClr val="1F2A37"/>
                 </a:solidFill>
                 <a:latin typeface="Amiri" pitchFamily="2" charset="-78"/>
+                <a:ea typeface="Amiri" pitchFamily="2" charset="-78"/>
                 <a:cs typeface="Amiri" pitchFamily="2" charset="-78"/>
               </a:rPr>
               <a:t>مَنَعَ التَّدْخِينُ نَفْسَهُ</a:t>
@@ -52150,6 +52399,7 @@
                   <a:srgbClr val="1F2A37"/>
                 </a:solidFill>
                 <a:latin typeface="Amiri" pitchFamily="2" charset="-78"/>
+                <a:ea typeface="Amiri" pitchFamily="2" charset="-78"/>
                 <a:cs typeface="Amiri" pitchFamily="2" charset="-78"/>
               </a:rPr>
               <a:t>يُمْنَعُ التَّدْخِينُ</a:t>
@@ -52601,6 +52851,7 @@
                   <a:srgbClr val="1F2A37"/>
                 </a:solidFill>
                 <a:latin typeface="Amiri" pitchFamily="2" charset="-78"/>
+                <a:ea typeface="Amiri" pitchFamily="2" charset="-78"/>
                 <a:cs typeface="Amiri" pitchFamily="2" charset="-78"/>
               </a:rPr>
               <a:t>نائب الفاعل</a:t>
@@ -52762,6 +53013,7 @@
                   <a:srgbClr val="1B3B6F"/>
                 </a:solidFill>
                 <a:latin typeface="Amiri" pitchFamily="2" charset="-78"/>
+                <a:ea typeface="Amiri" pitchFamily="2" charset="-78"/>
                 <a:cs typeface="Amiri" pitchFamily="2" charset="-78"/>
               </a:rPr>
               <a:t>فَتَحَ</a:t>
@@ -52876,6 +53128,7 @@
                   <a:srgbClr val="1F2A37"/>
                 </a:solidFill>
                 <a:latin typeface="Amiri" pitchFamily="2" charset="-78"/>
+                <a:ea typeface="Amiri" pitchFamily="2" charset="-78"/>
                 <a:cs typeface="Amiri" pitchFamily="2" charset="-78"/>
               </a:rPr>
               <a:t>يُفْتَحُ</a:t>
@@ -52977,6 +53230,7 @@
                   <a:srgbClr val="1F2A37"/>
                 </a:solidFill>
                 <a:latin typeface="Amiri" pitchFamily="2" charset="-78"/>
+                <a:ea typeface="Amiri" pitchFamily="2" charset="-78"/>
                 <a:cs typeface="Amiri" pitchFamily="2" charset="-78"/>
               </a:rPr>
               <a:t>يَفْتَحُ</a:t>
@@ -53078,6 +53332,7 @@
                   <a:srgbClr val="1F2A37"/>
                 </a:solidFill>
                 <a:latin typeface="Amiri" pitchFamily="2" charset="-78"/>
+                <a:ea typeface="Amiri" pitchFamily="2" charset="-78"/>
                 <a:cs typeface="Amiri" pitchFamily="2" charset="-78"/>
               </a:rPr>
               <a:t>فُتِحَ</a:t>
@@ -53413,6 +53668,7 @@
                   <a:srgbClr val="D4AF37"/>
                 </a:solidFill>
                 <a:latin typeface="Amiri" pitchFamily="2" charset="-78"/>
+                <a:ea typeface="Amiri" pitchFamily="2" charset="-78"/>
                 <a:cs typeface="Amiri" pitchFamily="2" charset="-78"/>
               </a:rPr>
               <a:t>م</a:t>
@@ -53733,6 +53989,7 @@
                   <a:srgbClr val="8A6D1E"/>
                 </a:solidFill>
                 <a:latin typeface="Amiri" pitchFamily="2" charset="-78"/>
+                <a:ea typeface="Amiri" pitchFamily="2" charset="-78"/>
                 <a:cs typeface="Amiri" pitchFamily="2" charset="-78"/>
               </a:rPr>
               <a:t>الإِجَابَاتُ وَالتَّعْلِيلُ</a:t>
@@ -54007,6 +54264,7 @@
                   <a:srgbClr val="9AA1AB"/>
                 </a:solidFill>
                 <a:latin typeface="Amiri" pitchFamily="2" charset="-78"/>
+                <a:ea typeface="Amiri" pitchFamily="2" charset="-78"/>
                 <a:cs typeface="Amiri" pitchFamily="2" charset="-78"/>
               </a:rPr>
               <a:t>كَتَبَتِ الرِّسَالَةُ</a:t>
@@ -54135,6 +54393,7 @@
                   <a:srgbClr val="1F2A37"/>
                 </a:solidFill>
                 <a:latin typeface="Amiri" pitchFamily="2" charset="-78"/>
+                <a:ea typeface="Amiri" pitchFamily="2" charset="-78"/>
                 <a:cs typeface="Amiri" pitchFamily="2" charset="-78"/>
               </a:rPr>
               <a:t>كُتِبَتِ الرِّسَالَةُ</a:t>
@@ -54236,6 +54495,7 @@
                   <a:srgbClr val="9AA1AB"/>
                 </a:solidFill>
                 <a:latin typeface="Amiri" pitchFamily="2" charset="-78"/>
+                <a:ea typeface="Amiri" pitchFamily="2" charset="-78"/>
                 <a:cs typeface="Amiri" pitchFamily="2" charset="-78"/>
               </a:rPr>
               <a:t>تَكْتُبُ الرِّسَالَةُ</a:t>
@@ -54537,6 +54797,7 @@
                   <a:srgbClr val="1F2A37"/>
                 </a:solidFill>
                 <a:latin typeface="Amiri" pitchFamily="2" charset="-78"/>
+                <a:ea typeface="Amiri" pitchFamily="2" charset="-78"/>
                 <a:cs typeface="Amiri" pitchFamily="2" charset="-78"/>
               </a:rPr>
               <a:t>تُكْتَبُ الرِّسَالَةُ</a:t>
@@ -54638,6 +54899,7 @@
                   <a:srgbClr val="9AA1AB"/>
                 </a:solidFill>
                 <a:latin typeface="Amiri" pitchFamily="2" charset="-78"/>
+                <a:ea typeface="Amiri" pitchFamily="2" charset="-78"/>
                 <a:cs typeface="Amiri" pitchFamily="2" charset="-78"/>
               </a:rPr>
               <a:t>تَكْتُبُ الرِّسَالَةُ</a:t>
@@ -54739,6 +55001,7 @@
                   <a:srgbClr val="9AA1AB"/>
                 </a:solidFill>
                 <a:latin typeface="Amiri" pitchFamily="2" charset="-78"/>
+                <a:ea typeface="Amiri" pitchFamily="2" charset="-78"/>
                 <a:cs typeface="Amiri" pitchFamily="2" charset="-78"/>
               </a:rPr>
               <a:t>كَتَبَ الرِّسَالَةَ</a:t>
@@ -55013,6 +55276,7 @@
                   <a:srgbClr val="9AA1AB"/>
                 </a:solidFill>
                 <a:latin typeface="Amiri" pitchFamily="2" charset="-78"/>
+                <a:ea typeface="Amiri" pitchFamily="2" charset="-78"/>
                 <a:cs typeface="Amiri" pitchFamily="2" charset="-78"/>
               </a:rPr>
               <a:t>يَمْنَعُ التَّدْخِينُ</a:t>
@@ -55114,6 +55378,7 @@
                   <a:srgbClr val="9AA1AB"/>
                 </a:solidFill>
                 <a:latin typeface="Amiri" pitchFamily="2" charset="-78"/>
+                <a:ea typeface="Amiri" pitchFamily="2" charset="-78"/>
                 <a:cs typeface="Amiri" pitchFamily="2" charset="-78"/>
               </a:rPr>
               <a:t>مَنَعَ التَّدْخِينُ نَفْسَهُ</a:t>
@@ -55242,6 +55507,7 @@
                   <a:srgbClr val="1F2A37"/>
                 </a:solidFill>
                 <a:latin typeface="Amiri" pitchFamily="2" charset="-78"/>
+                <a:ea typeface="Amiri" pitchFamily="2" charset="-78"/>
                 <a:cs typeface="Amiri" pitchFamily="2" charset="-78"/>
               </a:rPr>
               <a:t>يُمْنَعُ التَّدْخِينُ</a:t>
@@ -55758,6 +56024,7 @@
                   <a:srgbClr val="1F2A37"/>
                 </a:solidFill>
                 <a:latin typeface="Amiri" pitchFamily="2" charset="-78"/>
+                <a:ea typeface="Amiri" pitchFamily="2" charset="-78"/>
                 <a:cs typeface="Amiri" pitchFamily="2" charset="-78"/>
               </a:rPr>
               <a:t>نائب الفاعل</a:t>
@@ -55957,6 +56224,7 @@
                   <a:srgbClr val="1B3B6F"/>
                 </a:solidFill>
                 <a:latin typeface="Amiri" pitchFamily="2" charset="-78"/>
+                <a:ea typeface="Amiri" pitchFamily="2" charset="-78"/>
                 <a:cs typeface="Amiri" pitchFamily="2" charset="-78"/>
               </a:rPr>
               <a:t>فَتَحَ</a:t>
@@ -56098,6 +56366,7 @@
                   <a:srgbClr val="1F2A37"/>
                 </a:solidFill>
                 <a:latin typeface="Amiri" pitchFamily="2" charset="-78"/>
+                <a:ea typeface="Amiri" pitchFamily="2" charset="-78"/>
                 <a:cs typeface="Amiri" pitchFamily="2" charset="-78"/>
               </a:rPr>
               <a:t>يُفْتَحُ</a:t>
@@ -56199,6 +56468,7 @@
                   <a:srgbClr val="9AA1AB"/>
                 </a:solidFill>
                 <a:latin typeface="Amiri" pitchFamily="2" charset="-78"/>
+                <a:ea typeface="Amiri" pitchFamily="2" charset="-78"/>
                 <a:cs typeface="Amiri" pitchFamily="2" charset="-78"/>
               </a:rPr>
               <a:t>يَفْتَحُ</a:t>
@@ -56300,6 +56570,7 @@
                   <a:srgbClr val="9AA1AB"/>
                 </a:solidFill>
                 <a:latin typeface="Amiri" pitchFamily="2" charset="-78"/>
+                <a:ea typeface="Amiri" pitchFamily="2" charset="-78"/>
                 <a:cs typeface="Amiri" pitchFamily="2" charset="-78"/>
               </a:rPr>
               <a:t>فُتِحَ</a:t>
@@ -56486,6 +56757,7 @@
                   <a:srgbClr val="0E7C86"/>
                 </a:solidFill>
                 <a:latin typeface="Amiri" pitchFamily="2" charset="-78"/>
+                <a:ea typeface="Amiri" pitchFamily="2" charset="-78"/>
                 <a:cs typeface="Amiri" pitchFamily="2" charset="-78"/>
               </a:rPr>
               <a:t>كُتِبَتِ</a:t>
@@ -56499,6 +56771,7 @@
                   <a:srgbClr val="1B3B6F"/>
                 </a:solidFill>
                 <a:latin typeface="Amiri" pitchFamily="2" charset="-78"/>
+                <a:ea typeface="Amiri" pitchFamily="2" charset="-78"/>
                 <a:cs typeface="Amiri" pitchFamily="2" charset="-78"/>
               </a:rPr>
               <a:t> الرِّسَالَةُ ‖ </a:t>
@@ -56512,6 +56785,7 @@
                   <a:srgbClr val="D6336C"/>
                 </a:solidFill>
                 <a:latin typeface="Amiri" pitchFamily="2" charset="-78"/>
+                <a:ea typeface="Amiri" pitchFamily="2" charset="-78"/>
                 <a:cs typeface="Amiri" pitchFamily="2" charset="-78"/>
               </a:rPr>
               <a:t>تُكْتَبُ</a:t>
@@ -56525,6 +56799,7 @@
                   <a:srgbClr val="1B3B6F"/>
                 </a:solidFill>
                 <a:latin typeface="Amiri" pitchFamily="2" charset="-78"/>
+                <a:ea typeface="Amiri" pitchFamily="2" charset="-78"/>
                 <a:cs typeface="Amiri" pitchFamily="2" charset="-78"/>
               </a:rPr>
               <a:t> الرِّسَالَةُ</a:t>
@@ -56658,6 +56933,7 @@
                   <a:srgbClr val="D4AF37"/>
                 </a:solidFill>
                 <a:latin typeface="Amiri" pitchFamily="2" charset="-78"/>
+                <a:ea typeface="Amiri" pitchFamily="2" charset="-78"/>
                 <a:cs typeface="Amiri" pitchFamily="2" charset="-78"/>
               </a:rPr>
               <a:t>م</a:t>
@@ -56978,6 +57254,7 @@
                   <a:srgbClr val="8A6D1E"/>
                 </a:solidFill>
                 <a:latin typeface="Amiri" pitchFamily="2" charset="-78"/>
+                <a:ea typeface="Amiri" pitchFamily="2" charset="-78"/>
                 <a:cs typeface="Amiri" pitchFamily="2" charset="-78"/>
               </a:rPr>
               <a:t>الأَهْدَافُ وَمَعَايِيرُ النَّجَاحِ</a:t>
@@ -57126,6 +57403,7 @@
                   <a:srgbClr val="8A6D1E"/>
                 </a:solidFill>
                 <a:latin typeface="Amiri" pitchFamily="2" charset="-78"/>
+                <a:ea typeface="Amiri" pitchFamily="2" charset="-78"/>
                 <a:cs typeface="Amiri" pitchFamily="2" charset="-78"/>
               </a:rPr>
               <a:t>سَتَتَعَلَّمُ اليَوْمَ</a:t>
@@ -58281,6 +58559,7 @@
                   <a:srgbClr val="D4AF37"/>
                 </a:solidFill>
                 <a:latin typeface="Amiri" pitchFamily="2" charset="-78"/>
+                <a:ea typeface="Amiri" pitchFamily="2" charset="-78"/>
                 <a:cs typeface="Amiri" pitchFamily="2" charset="-78"/>
               </a:rPr>
               <a:t>م</a:t>
@@ -58601,6 +58880,7 @@
                   <a:srgbClr val="8A6D1E"/>
                 </a:solidFill>
                 <a:latin typeface="Amiri" pitchFamily="2" charset="-78"/>
+                <a:ea typeface="Amiri" pitchFamily="2" charset="-78"/>
                 <a:cs typeface="Amiri" pitchFamily="2" charset="-78"/>
               </a:rPr>
               <a:t>مُصْطَلَحَاتُ الدَّرْسِ</a:t>
@@ -58839,6 +59119,7 @@
                   <a:srgbClr val="1B3B6F"/>
                 </a:solidFill>
                 <a:latin typeface="Amiri" pitchFamily="2" charset="-78"/>
+                <a:ea typeface="Amiri" pitchFamily="2" charset="-78"/>
                 <a:cs typeface="Amiri" pitchFamily="2" charset="-78"/>
               </a:rPr>
               <a:t>الْمَبْنِيُّ لِلْمَعْلُومِ</a:t>
@@ -58931,6 +59212,7 @@
                   <a:srgbClr val="8A6D1E"/>
                 </a:solidFill>
                 <a:latin typeface="Amiri" pitchFamily="2" charset="-78"/>
+                <a:ea typeface="Amiri" pitchFamily="2" charset="-78"/>
                 <a:cs typeface="Amiri" pitchFamily="2" charset="-78"/>
               </a:rPr>
               <a:t>كَتَبَ الطَّالِبُ</a:t>
@@ -59131,6 +59413,7 @@
                   <a:srgbClr val="1B3B6F"/>
                 </a:solidFill>
                 <a:latin typeface="Amiri" pitchFamily="2" charset="-78"/>
+                <a:ea typeface="Amiri" pitchFamily="2" charset="-78"/>
                 <a:cs typeface="Amiri" pitchFamily="2" charset="-78"/>
               </a:rPr>
               <a:t>الْمَبْنِيُّ لِلْمَجْهُولِ</a:t>
@@ -59223,6 +59506,7 @@
                   <a:srgbClr val="8A6D1E"/>
                 </a:solidFill>
                 <a:latin typeface="Amiri" pitchFamily="2" charset="-78"/>
+                <a:ea typeface="Amiri" pitchFamily="2" charset="-78"/>
                 <a:cs typeface="Amiri" pitchFamily="2" charset="-78"/>
               </a:rPr>
               <a:t>كُتِبَ الدَّرْسُ</a:t>
@@ -59423,6 +59707,7 @@
                   <a:srgbClr val="1B3B6F"/>
                 </a:solidFill>
                 <a:latin typeface="Amiri" pitchFamily="2" charset="-78"/>
+                <a:ea typeface="Amiri" pitchFamily="2" charset="-78"/>
                 <a:cs typeface="Amiri" pitchFamily="2" charset="-78"/>
               </a:rPr>
               <a:t>الْفَاعِلُ</a:t>
@@ -59515,6 +59800,7 @@
                   <a:srgbClr val="8A6D1E"/>
                 </a:solidFill>
                 <a:latin typeface="Amiri" pitchFamily="2" charset="-78"/>
+                <a:ea typeface="Amiri" pitchFamily="2" charset="-78"/>
                 <a:cs typeface="Amiri" pitchFamily="2" charset="-78"/>
               </a:rPr>
               <a:t>الطَّالِبُ</a:t>
@@ -59715,6 +60001,7 @@
                   <a:srgbClr val="1B3B6F"/>
                 </a:solidFill>
                 <a:latin typeface="Amiri" pitchFamily="2" charset="-78"/>
+                <a:ea typeface="Amiri" pitchFamily="2" charset="-78"/>
                 <a:cs typeface="Amiri" pitchFamily="2" charset="-78"/>
               </a:rPr>
               <a:t>نَائِبُ الْفَاعِلِ</a:t>
@@ -59807,6 +60094,7 @@
                   <a:srgbClr val="8A6D1E"/>
                 </a:solidFill>
                 <a:latin typeface="Amiri" pitchFamily="2" charset="-78"/>
+                <a:ea typeface="Amiri" pitchFamily="2" charset="-78"/>
                 <a:cs typeface="Amiri" pitchFamily="2" charset="-78"/>
               </a:rPr>
               <a:t>الرِّسَالَةُ</a:t>
@@ -60007,6 +60295,7 @@
                   <a:srgbClr val="1B3B6F"/>
                 </a:solidFill>
                 <a:latin typeface="Amiri" pitchFamily="2" charset="-78"/>
+                <a:ea typeface="Amiri" pitchFamily="2" charset="-78"/>
                 <a:cs typeface="Amiri" pitchFamily="2" charset="-78"/>
               </a:rPr>
               <a:t>يُمْنَعُ</a:t>
@@ -60099,6 +60388,7 @@
                   <a:srgbClr val="8A6D1E"/>
                 </a:solidFill>
                 <a:latin typeface="Amiri" pitchFamily="2" charset="-78"/>
+                <a:ea typeface="Amiri" pitchFamily="2" charset="-78"/>
                 <a:cs typeface="Amiri" pitchFamily="2" charset="-78"/>
               </a:rPr>
               <a:t>يُمْنَعُ التَّدْخِينُ</a:t>
@@ -60299,6 +60589,7 @@
                   <a:srgbClr val="1B3B6F"/>
                 </a:solidFill>
                 <a:latin typeface="Amiri" pitchFamily="2" charset="-78"/>
+                <a:ea typeface="Amiri" pitchFamily="2" charset="-78"/>
                 <a:cs typeface="Amiri" pitchFamily="2" charset="-78"/>
               </a:rPr>
               <a:t>يُقَالُ إِنَّ</a:t>
@@ -60391,6 +60682,7 @@
                   <a:srgbClr val="8A6D1E"/>
                 </a:solidFill>
                 <a:latin typeface="Amiri" pitchFamily="2" charset="-78"/>
+                <a:ea typeface="Amiri" pitchFamily="2" charset="-78"/>
                 <a:cs typeface="Amiri" pitchFamily="2" charset="-78"/>
               </a:rPr>
               <a:t>يُقَالُ إِنَّ …</a:t>
@@ -60524,6 +60816,7 @@
                   <a:srgbClr val="D4AF37"/>
                 </a:solidFill>
                 <a:latin typeface="Amiri" pitchFamily="2" charset="-78"/>
+                <a:ea typeface="Amiri" pitchFamily="2" charset="-78"/>
                 <a:cs typeface="Amiri" pitchFamily="2" charset="-78"/>
               </a:rPr>
               <a:t>م</a:t>
@@ -60844,6 +61137,7 @@
                   <a:srgbClr val="8A6D1E"/>
                 </a:solidFill>
                 <a:latin typeface="Amiri" pitchFamily="2" charset="-78"/>
+                <a:ea typeface="Amiri" pitchFamily="2" charset="-78"/>
                 <a:cs typeface="Amiri" pitchFamily="2" charset="-78"/>
               </a:rPr>
               <a:t>الْمَاضِي الْمَبْنِيُّ لِلْمَجْهُولِ</a:t>
@@ -61124,6 +61418,7 @@
                   <a:srgbClr val="1B3B6F"/>
                 </a:solidFill>
                 <a:latin typeface="Amiri" pitchFamily="2" charset="-78"/>
+                <a:ea typeface="Amiri" pitchFamily="2" charset="-78"/>
                 <a:cs typeface="Amiri" pitchFamily="2" charset="-78"/>
               </a:rPr>
               <a:t>كُتِبَتِ الرِّسَالَةُ.</a:t>
@@ -61162,6 +61457,7 @@
                   <a:srgbClr val="1B3B6F"/>
                 </a:solidFill>
                 <a:latin typeface="Amiri" pitchFamily="2" charset="-78"/>
+                <a:ea typeface="Amiri" pitchFamily="2" charset="-78"/>
                 <a:cs typeface="Amiri" pitchFamily="2" charset="-78"/>
               </a:rPr>
               <a:t>كَتَبَ الطَّالِبُ الرِّسَالَةَ.</a:t>
@@ -61330,6 +61626,7 @@
                   <a:srgbClr val="1B3B6F"/>
                 </a:solidFill>
                 <a:latin typeface="Amiri" pitchFamily="2" charset="-78"/>
+                <a:ea typeface="Amiri" pitchFamily="2" charset="-78"/>
                 <a:cs typeface="Amiri" pitchFamily="2" charset="-78"/>
               </a:rPr>
               <a:t>فُتِحَ الْبَابُ.</a:t>
@@ -61368,6 +61665,7 @@
                   <a:srgbClr val="1B3B6F"/>
                 </a:solidFill>
                 <a:latin typeface="Amiri" pitchFamily="2" charset="-78"/>
+                <a:ea typeface="Amiri" pitchFamily="2" charset="-78"/>
                 <a:cs typeface="Amiri" pitchFamily="2" charset="-78"/>
               </a:rPr>
               <a:t>فَتَحَ الْمُوَظَّفُ الْبَابَ.</a:t>
@@ -61536,6 +61834,7 @@
                   <a:srgbClr val="1B3B6F"/>
                 </a:solidFill>
                 <a:latin typeface="Amiri" pitchFamily="2" charset="-78"/>
+                <a:ea typeface="Amiri" pitchFamily="2" charset="-78"/>
                 <a:cs typeface="Amiri" pitchFamily="2" charset="-78"/>
               </a:rPr>
               <a:t>كُسِرَ الزُّجَاجُ.</a:t>
@@ -61574,6 +61873,7 @@
                   <a:srgbClr val="1B3B6F"/>
                 </a:solidFill>
                 <a:latin typeface="Amiri" pitchFamily="2" charset="-78"/>
+                <a:ea typeface="Amiri" pitchFamily="2" charset="-78"/>
                 <a:cs typeface="Amiri" pitchFamily="2" charset="-78"/>
               </a:rPr>
               <a:t>كَسَرَ الْوَلَدُ الزُّجَاجَ.</a:t>
@@ -61742,6 +62042,7 @@
                   <a:srgbClr val="1B3B6F"/>
                 </a:solidFill>
                 <a:latin typeface="Amiri" pitchFamily="2" charset="-78"/>
+                <a:ea typeface="Amiri" pitchFamily="2" charset="-78"/>
                 <a:cs typeface="Amiri" pitchFamily="2" charset="-78"/>
               </a:rPr>
               <a:t>أُعْلِنَتِ النَّتَائِجُ.</a:t>
@@ -61780,6 +62081,7 @@
                   <a:srgbClr val="1B3B6F"/>
                 </a:solidFill>
                 <a:latin typeface="Amiri" pitchFamily="2" charset="-78"/>
+                <a:ea typeface="Amiri" pitchFamily="2" charset="-78"/>
                 <a:cs typeface="Amiri" pitchFamily="2" charset="-78"/>
               </a:rPr>
               <a:t>أَعْلَنَتِ الْمَدْرَسَةُ النَّتَائِجَ.</a:t>
@@ -61951,6 +62253,7 @@
                   <a:srgbClr val="D4AF37"/>
                 </a:solidFill>
                 <a:latin typeface="Amiri" pitchFamily="2" charset="-78"/>
+                <a:ea typeface="Amiri" pitchFamily="2" charset="-78"/>
                 <a:cs typeface="Amiri" pitchFamily="2" charset="-78"/>
               </a:rPr>
               <a:t>م</a:t>
@@ -62271,6 +62574,7 @@
                   <a:srgbClr val="8A6D1E"/>
                 </a:solidFill>
                 <a:latin typeface="Amiri" pitchFamily="2" charset="-78"/>
+                <a:ea typeface="Amiri" pitchFamily="2" charset="-78"/>
                 <a:cs typeface="Amiri" pitchFamily="2" charset="-78"/>
               </a:rPr>
               <a:t>الْمُضَارِعُ الْمَبْنِيُّ لِلْمَجْهُولِ</a:t>
@@ -62551,6 +62855,7 @@
                   <a:srgbClr val="1B3B6F"/>
                 </a:solidFill>
                 <a:latin typeface="Amiri" pitchFamily="2" charset="-78"/>
+                <a:ea typeface="Amiri" pitchFamily="2" charset="-78"/>
                 <a:cs typeface="Amiri" pitchFamily="2" charset="-78"/>
               </a:rPr>
               <a:t>تُكْتَبُ الرِّسَالَةُ.</a:t>
@@ -62589,6 +62894,7 @@
                   <a:srgbClr val="1B3B6F"/>
                 </a:solidFill>
                 <a:latin typeface="Amiri" pitchFamily="2" charset="-78"/>
+                <a:ea typeface="Amiri" pitchFamily="2" charset="-78"/>
                 <a:cs typeface="Amiri" pitchFamily="2" charset="-78"/>
               </a:rPr>
               <a:t>يَكْتُبُ الطَّالِبُ الرِّسَالَةَ.</a:t>
@@ -62757,6 +63063,7 @@
                   <a:srgbClr val="1B3B6F"/>
                 </a:solidFill>
                 <a:latin typeface="Amiri" pitchFamily="2" charset="-78"/>
+                <a:ea typeface="Amiri" pitchFamily="2" charset="-78"/>
                 <a:cs typeface="Amiri" pitchFamily="2" charset="-78"/>
               </a:rPr>
               <a:t>يُفْتَحُ الْبَابُ.</a:t>
@@ -62795,6 +63102,7 @@
                   <a:srgbClr val="1B3B6F"/>
                 </a:solidFill>
                 <a:latin typeface="Amiri" pitchFamily="2" charset="-78"/>
+                <a:ea typeface="Amiri" pitchFamily="2" charset="-78"/>
                 <a:cs typeface="Amiri" pitchFamily="2" charset="-78"/>
               </a:rPr>
               <a:t>يَفْتَحُ الْمُوَظَّفُ الْبَابَ.</a:t>
@@ -62963,6 +63271,7 @@
                   <a:srgbClr val="1B3B6F"/>
                 </a:solidFill>
                 <a:latin typeface="Amiri" pitchFamily="2" charset="-78"/>
+                <a:ea typeface="Amiri" pitchFamily="2" charset="-78"/>
                 <a:cs typeface="Amiri" pitchFamily="2" charset="-78"/>
               </a:rPr>
               <a:t>يُمْنَعُ التَّدْخِينُ.</a:t>
@@ -63001,6 +63310,7 @@
                   <a:srgbClr val="1B3B6F"/>
                 </a:solidFill>
                 <a:latin typeface="Amiri" pitchFamily="2" charset="-78"/>
+                <a:ea typeface="Amiri" pitchFamily="2" charset="-78"/>
                 <a:cs typeface="Amiri" pitchFamily="2" charset="-78"/>
               </a:rPr>
               <a:t>يَمْنَعُ الْقَانُونُ التَّدْخِينَ.</a:t>
@@ -63169,6 +63479,7 @@
                   <a:srgbClr val="1B3B6F"/>
                 </a:solidFill>
                 <a:latin typeface="Amiri" pitchFamily="2" charset="-78"/>
+                <a:ea typeface="Amiri" pitchFamily="2" charset="-78"/>
                 <a:cs typeface="Amiri" pitchFamily="2" charset="-78"/>
               </a:rPr>
               <a:t>تُسْتَعْمَلُ التِّقْنِيَّةُ.</a:t>
@@ -63207,6 +63518,7 @@
                   <a:srgbClr val="1B3B6F"/>
                 </a:solidFill>
                 <a:latin typeface="Amiri" pitchFamily="2" charset="-78"/>
+                <a:ea typeface="Amiri" pitchFamily="2" charset="-78"/>
                 <a:cs typeface="Amiri" pitchFamily="2" charset="-78"/>
               </a:rPr>
               <a:t>يَسْتَعْمِلُ النَّاسُ التِّقْنِيَّةَ.</a:t>
@@ -63343,13 +63655,9 @@
     <a:fontScheme name="Office">
       <a:majorFont>
         <a:latin typeface="Calibri Light" panose="020F0302020204030204"/>
-        <a:ea typeface=""/>
-        <a:cs typeface=""/>
-        <a:font script="Jpan" typeface="游ゴシック Light"/>
-        <a:font script="Hang" typeface="맑은 고딕"/>
-        <a:font script="Hans" typeface="等线 Light"/>
-        <a:font script="Hant" typeface="新細明體"/>
-        <a:font script="Arab" typeface="Times New Roman"/>
+        <a:ea typeface="Amiri" pitchFamily="2" charset="-78"/>
+        <a:cs typeface="Amiri" pitchFamily="2" charset="-78"/>
+        <a:font script="Arab" typeface="Amiri"/>
         <a:font script="Hebr" typeface="Times New Roman"/>
         <a:font script="Thai" typeface="Angsana New"/>
         <a:font script="Ethi" typeface="Nyala"/>
@@ -63395,13 +63703,9 @@
       </a:majorFont>
       <a:minorFont>
         <a:latin typeface="Calibri" panose="020F0502020204030204"/>
-        <a:ea typeface=""/>
-        <a:cs typeface=""/>
-        <a:font script="Jpan" typeface="游ゴシック"/>
-        <a:font script="Hang" typeface="맑은 고딕"/>
-        <a:font script="Hans" typeface="等线"/>
-        <a:font script="Hant" typeface="新細明體"/>
-        <a:font script="Arab" typeface="Arial"/>
+        <a:ea typeface="Amiri" pitchFamily="2" charset="-78"/>
+        <a:cs typeface="Amiri" pitchFamily="2" charset="-78"/>
+        <a:font script="Arab" typeface="Amiri"/>
         <a:font script="Hebr" typeface="Arial"/>
         <a:font script="Thai" typeface="Cordia New"/>
         <a:font script="Ethi" typeface="Nyala"/>
